--- a/Lecture Slides/16 - Free Block Management.pptx
+++ b/Lecture Slides/16 - Free Block Management.pptx
@@ -150,7 +150,7 @@
           <a:p>
             <a:fld id="{6BD7B703-0A18-4A67-A00C-973245573E61}" type="datetimeFigureOut">
               <a:rPr lang="en-US" smtClean="0"/>
-              <a:t>3/24/2026</a:t>
+              <a:t>3/25/2026</a:t>
             </a:fld>
             <a:endParaRPr lang="en-US"/>
           </a:p>
@@ -1986,6 +1986,210 @@
           <a:p>
             <a:endParaRPr lang="en-US" dirty="0"/>
           </a:p>
+          <a:p>
+            <a:pPr marL="0" marR="0" lvl="0" indent="0" algn="l" defTabSz="914400" rtl="0" eaLnBrk="1" fontAlgn="auto" latinLnBrk="0" hangingPunct="1">
+              <a:lnSpc>
+                <a:spcPct val="100000"/>
+              </a:lnSpc>
+              <a:spcBef>
+                <a:spcPts val="0"/>
+              </a:spcBef>
+              <a:spcAft>
+                <a:spcPts val="0"/>
+              </a:spcAft>
+              <a:buClrTx/>
+              <a:buSzTx/>
+              <a:buFontTx/>
+              <a:buNone/>
+              <a:tabLst/>
+              <a:defRPr/>
+            </a:pPr>
+            <a:r>
+              <a:rPr lang="en-US" b="1" dirty="0"/>
+              <a:t>Q.</a:t>
+            </a:r>
+            <a:r>
+              <a:rPr lang="en-US" dirty="0"/>
+              <a:t> </a:t>
+            </a:r>
+            <a:r>
+              <a:rPr lang="en-US" sz="1200" dirty="0">
+                <a:solidFill>
+                  <a:srgbClr val="0F2044"/>
+                </a:solidFill>
+                <a:latin typeface="Arial MT"/>
+                <a:cs typeface="Arial MT"/>
+              </a:rPr>
+              <a:t>What</a:t>
+            </a:r>
+            <a:r>
+              <a:rPr lang="en-US" sz="1200" spc="-30" dirty="0">
+                <a:solidFill>
+                  <a:srgbClr val="0F2044"/>
+                </a:solidFill>
+                <a:latin typeface="Arial MT"/>
+                <a:cs typeface="Arial MT"/>
+              </a:rPr>
+              <a:t> </a:t>
+            </a:r>
+            <a:r>
+              <a:rPr lang="en-US" sz="1200" dirty="0">
+                <a:solidFill>
+                  <a:srgbClr val="0F2044"/>
+                </a:solidFill>
+                <a:latin typeface="Arial MT"/>
+                <a:cs typeface="Arial MT"/>
+              </a:rPr>
+              <a:t>information</a:t>
+            </a:r>
+            <a:r>
+              <a:rPr lang="en-US" sz="1200" spc="-25" dirty="0">
+                <a:solidFill>
+                  <a:srgbClr val="0F2044"/>
+                </a:solidFill>
+                <a:latin typeface="Arial MT"/>
+                <a:cs typeface="Arial MT"/>
+              </a:rPr>
+              <a:t> </a:t>
+            </a:r>
+            <a:r>
+              <a:rPr lang="en-US" sz="1200" dirty="0">
+                <a:solidFill>
+                  <a:srgbClr val="0F2044"/>
+                </a:solidFill>
+                <a:latin typeface="Arial MT"/>
+                <a:cs typeface="Arial MT"/>
+              </a:rPr>
+              <a:t>does</a:t>
+            </a:r>
+            <a:r>
+              <a:rPr lang="en-US" sz="1200" spc="-25" dirty="0">
+                <a:solidFill>
+                  <a:srgbClr val="0F2044"/>
+                </a:solidFill>
+                <a:latin typeface="Arial MT"/>
+                <a:cs typeface="Arial MT"/>
+              </a:rPr>
+              <a:t> the </a:t>
+            </a:r>
+            <a:r>
+              <a:rPr lang="en-US" sz="1200" dirty="0">
+                <a:solidFill>
+                  <a:srgbClr val="0F2044"/>
+                </a:solidFill>
+                <a:latin typeface="Arial MT"/>
+                <a:cs typeface="Arial MT"/>
+              </a:rPr>
+              <a:t>allocator</a:t>
+            </a:r>
+            <a:r>
+              <a:rPr lang="en-US" sz="1200" spc="-25" dirty="0">
+                <a:solidFill>
+                  <a:srgbClr val="0F2044"/>
+                </a:solidFill>
+                <a:latin typeface="Arial MT"/>
+                <a:cs typeface="Arial MT"/>
+              </a:rPr>
+              <a:t> </a:t>
+            </a:r>
+            <a:r>
+              <a:rPr lang="en-US" sz="1200" dirty="0">
+                <a:solidFill>
+                  <a:srgbClr val="0F2044"/>
+                </a:solidFill>
+                <a:latin typeface="Arial MT"/>
+                <a:cs typeface="Arial MT"/>
+              </a:rPr>
+              <a:t>need</a:t>
+            </a:r>
+            <a:r>
+              <a:rPr lang="en-US" sz="1200" spc="-10" dirty="0">
+                <a:solidFill>
+                  <a:srgbClr val="0F2044"/>
+                </a:solidFill>
+                <a:latin typeface="Arial MT"/>
+                <a:cs typeface="Arial MT"/>
+              </a:rPr>
+              <a:t> </a:t>
+            </a:r>
+            <a:r>
+              <a:rPr lang="en-US" sz="1200" dirty="0">
+                <a:solidFill>
+                  <a:srgbClr val="0F2044"/>
+                </a:solidFill>
+                <a:latin typeface="Arial MT"/>
+                <a:cs typeface="Arial MT"/>
+              </a:rPr>
+              <a:t>to</a:t>
+            </a:r>
+            <a:r>
+              <a:rPr lang="en-US" sz="1200" spc="-15" dirty="0">
+                <a:solidFill>
+                  <a:srgbClr val="0F2044"/>
+                </a:solidFill>
+                <a:latin typeface="Arial MT"/>
+                <a:cs typeface="Arial MT"/>
+              </a:rPr>
+              <a:t> </a:t>
+            </a:r>
+            <a:r>
+              <a:rPr lang="en-US" sz="1200" dirty="0">
+                <a:solidFill>
+                  <a:srgbClr val="0F2044"/>
+                </a:solidFill>
+                <a:latin typeface="Arial MT"/>
+                <a:cs typeface="Arial MT"/>
+              </a:rPr>
+              <a:t>keep</a:t>
+            </a:r>
+            <a:r>
+              <a:rPr lang="en-US" sz="1200" spc="-10" dirty="0">
+                <a:solidFill>
+                  <a:srgbClr val="0F2044"/>
+                </a:solidFill>
+                <a:latin typeface="Arial MT"/>
+                <a:cs typeface="Arial MT"/>
+              </a:rPr>
+              <a:t> </a:t>
+            </a:r>
+            <a:r>
+              <a:rPr lang="en-US" sz="1200" dirty="0">
+                <a:solidFill>
+                  <a:srgbClr val="0F2044"/>
+                </a:solidFill>
+                <a:latin typeface="Arial MT"/>
+                <a:cs typeface="Arial MT"/>
+              </a:rPr>
+              <a:t>track</a:t>
+            </a:r>
+            <a:r>
+              <a:rPr lang="en-US" sz="1200" spc="-10" dirty="0">
+                <a:solidFill>
+                  <a:srgbClr val="0F2044"/>
+                </a:solidFill>
+                <a:latin typeface="Arial MT"/>
+                <a:cs typeface="Arial MT"/>
+              </a:rPr>
+              <a:t> </a:t>
+            </a:r>
+            <a:r>
+              <a:rPr lang="en-US" sz="1200" spc="-25" dirty="0">
+                <a:solidFill>
+                  <a:srgbClr val="0F2044"/>
+                </a:solidFill>
+                <a:latin typeface="Arial MT"/>
+                <a:cs typeface="Arial MT"/>
+              </a:rPr>
+              <a:t>of?</a:t>
+            </a:r>
+            <a:endParaRPr lang="en-US" sz="1200" dirty="0">
+              <a:latin typeface="Arial MT"/>
+              <a:cs typeface="Arial MT"/>
+            </a:endParaRPr>
+          </a:p>
+          <a:p>
+            <a:endParaRPr lang="en-US" dirty="0"/>
+          </a:p>
         </p:txBody>
       </p:sp>
       <p:sp>
@@ -2917,7 +3121,15 @@
             </a:r>
             <a:r>
               <a:rPr lang="en-US" u="sng" dirty="0"/>
-              <a:t>one extra word of overhead</a:t>
+              <a:t>one extra </a:t>
+            </a:r>
+            <a:r>
+              <a:rPr lang="en-US" b="1" u="sng" dirty="0"/>
+              <a:t>word</a:t>
+            </a:r>
+            <a:r>
+              <a:rPr lang="en-US" u="sng" dirty="0"/>
+              <a:t> of overhead</a:t>
             </a:r>
             <a:r>
               <a:rPr lang="en-US" dirty="0"/>
@@ -3072,7 +3284,30 @@
                 <a:ea typeface="+mn-ea"/>
                 <a:cs typeface="+mn-cs"/>
               </a:rPr>
-              <a:t>Every block has a size/status header; the allocator must scan all blocks (allocated and free) sequentially.</a:t>
+              <a:t>Every block has a size/status header; </a:t>
+            </a:r>
+            <a:br>
+              <a:rPr lang="en-US" sz="1200" kern="1200" dirty="0">
+                <a:solidFill>
+                  <a:schemeClr val="tx1"/>
+                </a:solidFill>
+                <a:effectLst/>
+                <a:latin typeface="+mn-lt"/>
+                <a:ea typeface="+mn-ea"/>
+                <a:cs typeface="+mn-cs"/>
+              </a:rPr>
+            </a:br>
+            <a:r>
+              <a:rPr lang="en-US" sz="1200" kern="1200" dirty="0">
+                <a:solidFill>
+                  <a:schemeClr val="tx1"/>
+                </a:solidFill>
+                <a:effectLst/>
+                <a:latin typeface="+mn-lt"/>
+                <a:ea typeface="+mn-ea"/>
+                <a:cs typeface="+mn-cs"/>
+              </a:rPr>
+              <a:t>the allocator must scan all blocks (allocated and free) sequentially.</a:t>
             </a:r>
           </a:p>
           <a:p>
@@ -3125,7 +3360,30 @@
                 <a:ea typeface="+mn-ea"/>
                 <a:cs typeface="+mn-cs"/>
               </a:rPr>
-              <a:t>Only free blocks are linked; free blocks contain pointers to the next and previous free blocks.</a:t>
+              <a:t>Only free blocks are linked; </a:t>
+            </a:r>
+            <a:br>
+              <a:rPr lang="en-US" sz="1200" kern="1200" dirty="0">
+                <a:solidFill>
+                  <a:schemeClr val="tx1"/>
+                </a:solidFill>
+                <a:effectLst/>
+                <a:latin typeface="+mn-lt"/>
+                <a:ea typeface="+mn-ea"/>
+                <a:cs typeface="+mn-cs"/>
+              </a:rPr>
+            </a:br>
+            <a:r>
+              <a:rPr lang="en-US" sz="1200" kern="1200" dirty="0">
+                <a:solidFill>
+                  <a:schemeClr val="tx1"/>
+                </a:solidFill>
+                <a:effectLst/>
+                <a:latin typeface="+mn-lt"/>
+                <a:ea typeface="+mn-ea"/>
+                <a:cs typeface="+mn-cs"/>
+              </a:rPr>
+              <a:t>free blocks contain pointers to the next and previous free blocks.</a:t>
             </a:r>
           </a:p>
           <a:p>
@@ -3992,7 +4250,7 @@
           <a:p>
             <a:fld id="{1D8BD707-D9CF-40AE-B4C6-C98DA3205C09}" type="datetimeFigureOut">
               <a:rPr lang="en-US"/>
-              <a:t>3/24/2026</a:t>
+              <a:t>3/25/2026</a:t>
             </a:fld>
             <a:endParaRPr lang="en-US"/>
           </a:p>
@@ -4169,7 +4427,7 @@
           <a:p>
             <a:fld id="{1D8BD707-D9CF-40AE-B4C6-C98DA3205C09}" type="datetimeFigureOut">
               <a:rPr lang="en-US"/>
-              <a:t>3/24/2026</a:t>
+              <a:t>3/25/2026</a:t>
             </a:fld>
             <a:endParaRPr lang="en-US"/>
           </a:p>
@@ -4387,7 +4645,7 @@
           <a:p>
             <a:fld id="{1D8BD707-D9CF-40AE-B4C6-C98DA3205C09}" type="datetimeFigureOut">
               <a:rPr lang="en-US"/>
-              <a:t>3/24/2026</a:t>
+              <a:t>3/25/2026</a:t>
             </a:fld>
             <a:endParaRPr lang="en-US"/>
           </a:p>
@@ -4535,7 +4793,7 @@
           <a:p>
             <a:fld id="{1D8BD707-D9CF-40AE-B4C6-C98DA3205C09}" type="datetimeFigureOut">
               <a:rPr lang="en-US"/>
-              <a:t>3/24/2026</a:t>
+              <a:t>3/25/2026</a:t>
             </a:fld>
             <a:endParaRPr lang="en-US"/>
           </a:p>
@@ -4654,7 +4912,7 @@
           <a:p>
             <a:fld id="{1D8BD707-D9CF-40AE-B4C6-C98DA3205C09}" type="datetimeFigureOut">
               <a:rPr lang="en-US"/>
-              <a:t>3/24/2026</a:t>
+              <a:t>3/25/2026</a:t>
             </a:fld>
             <a:endParaRPr lang="en-US"/>
           </a:p>
@@ -4901,7 +5159,7 @@
           <a:p>
             <a:fld id="{1D8BD707-D9CF-40AE-B4C6-C98DA3205C09}" type="datetimeFigureOut">
               <a:rPr lang="en-US"/>
-              <a:t>3/24/2026</a:t>
+              <a:t>3/25/2026</a:t>
             </a:fld>
             <a:endParaRPr lang="en-US"/>
           </a:p>
@@ -7003,9 +7261,16 @@
                 <a:latin typeface="Arial"/>
                 <a:cs typeface="Arial"/>
               </a:rPr>
-              <a:t>Observation:</a:t>
-            </a:r>
-            <a:endParaRPr lang="en-US" b="1" spc="-10" dirty="0">
+              <a:t>Observation: </a:t>
+            </a:r>
+            <a:r>
+              <a:rPr lang="en-US" sz="1800" spc="-10" dirty="0">
+                <a:latin typeface="Arial"/>
+                <a:cs typeface="Arial"/>
+              </a:rPr>
+              <a:t>(for 8-byte alignment)</a:t>
+            </a:r>
+            <a:endParaRPr lang="en-US" spc="-10" dirty="0">
               <a:solidFill>
                 <a:srgbClr val="0F2044"/>
               </a:solidFill>
@@ -7263,7 +7528,7 @@
               <a:t> </a:t>
             </a:r>
             <a:r>
-              <a:rPr sz="1800" dirty="0">
+              <a:rPr sz="1800" b="1" dirty="0">
                 <a:solidFill>
                   <a:srgbClr val="0F2044"/>
                 </a:solidFill>
@@ -7273,14 +7538,24 @@
               <a:t>allocation</a:t>
             </a:r>
             <a:r>
-              <a:rPr sz="1800" spc="-20" dirty="0">
-                <a:solidFill>
-                  <a:srgbClr val="0F2044"/>
-                </a:solidFill>
-                <a:latin typeface="Arial MT"/>
-                <a:cs typeface="Arial MT"/>
-              </a:rPr>
-              <a:t> </a:t>
+              <a:rPr sz="1800" b="1" spc="-20" dirty="0">
+                <a:solidFill>
+                  <a:srgbClr val="0F2044"/>
+                </a:solidFill>
+                <a:latin typeface="Arial MT"/>
+                <a:cs typeface="Arial MT"/>
+              </a:rPr>
+              <a:t> </a:t>
+            </a:r>
+            <a:r>
+              <a:rPr sz="1800" b="1" spc="-10" dirty="0">
+                <a:solidFill>
+                  <a:srgbClr val="0F2044"/>
+                </a:solidFill>
+                <a:latin typeface="Arial MT"/>
+                <a:cs typeface="Arial MT"/>
+              </a:rPr>
+              <a:t>flag</a:t>
             </a:r>
             <a:r>
               <a:rPr sz="1800" spc="-10" dirty="0">
@@ -7290,7 +7565,7 @@
                 <a:latin typeface="Arial MT"/>
                 <a:cs typeface="Arial MT"/>
               </a:rPr>
-              <a:t>flag.</a:t>
+              <a:t>.</a:t>
             </a:r>
             <a:endParaRPr sz="1800" dirty="0">
               <a:latin typeface="Arial MT"/>
@@ -16044,7 +16319,7 @@
         <p:spPr>
           <a:xfrm>
             <a:off x="5021500" y="5494371"/>
-            <a:ext cx="5257165" cy="1152239"/>
+            <a:ext cx="5491730" cy="1152239"/>
           </a:xfrm>
           <a:prstGeom prst="rect">
             <a:avLst/>
@@ -16067,6 +16342,16 @@
                 <a:spcPts val="1800"/>
               </a:spcAft>
             </a:pPr>
+            <a:r>
+              <a:rPr lang="en-US" sz="1800" b="1" dirty="0">
+                <a:solidFill>
+                  <a:srgbClr val="0F2044"/>
+                </a:solidFill>
+                <a:latin typeface="Arial MT"/>
+                <a:cs typeface="Arial MT"/>
+              </a:rPr>
+              <a:t>Problem: </a:t>
+            </a:r>
             <a:r>
               <a:rPr sz="1800" dirty="0">
                 <a:solidFill>
@@ -18305,7 +18590,7 @@
         <p:spPr>
           <a:xfrm>
             <a:off x="5021500" y="5494371"/>
-            <a:ext cx="5257165" cy="1152239"/>
+            <a:ext cx="5570300" cy="1152239"/>
           </a:xfrm>
           <a:prstGeom prst="rect">
             <a:avLst/>
@@ -18328,6 +18613,16 @@
                 <a:spcPts val="1800"/>
               </a:spcAft>
             </a:pPr>
+            <a:r>
+              <a:rPr lang="en-US" sz="1800" b="1" dirty="0">
+                <a:solidFill>
+                  <a:srgbClr val="0F2044"/>
+                </a:solidFill>
+                <a:latin typeface="Arial MT"/>
+                <a:cs typeface="Arial MT"/>
+              </a:rPr>
+              <a:t>Problem: </a:t>
+            </a:r>
             <a:r>
               <a:rPr sz="1800" dirty="0">
                 <a:solidFill>
@@ -19588,11 +19883,18 @@
               <a:t> </a:t>
             </a:r>
             <a:r>
+              <a:rPr sz="1600" u="sng" spc="-10" dirty="0">
+                <a:latin typeface="Arial MT"/>
+                <a:cs typeface="Arial MT"/>
+              </a:rPr>
+              <a:t>thrashing</a:t>
+            </a:r>
+            <a:r>
               <a:rPr sz="1600" spc="-10" dirty="0">
                 <a:latin typeface="Arial MT"/>
                 <a:cs typeface="Arial MT"/>
               </a:rPr>
-              <a:t>thrashing </a:t>
+              <a:t> </a:t>
             </a:r>
             <a:r>
               <a:rPr sz="1600" dirty="0">
@@ -19894,11 +20196,11 @@
               <a:t> </a:t>
             </a:r>
             <a:r>
-              <a:rPr sz="1600" dirty="0">
-                <a:latin typeface="Arial MT"/>
-                <a:cs typeface="Arial MT"/>
-              </a:rPr>
-              <a:t>hope</a:t>
+              <a:rPr lang="en-US" sz="1600" dirty="0">
+                <a:latin typeface="Arial MT"/>
+                <a:cs typeface="Arial MT"/>
+              </a:rPr>
+              <a:t>list</a:t>
             </a:r>
             <a:r>
               <a:rPr sz="1600" spc="-35" dirty="0">
@@ -51962,7 +52264,7 @@
               </a:rPr>
               <a:t>of?</a:t>
             </a:r>
-            <a:endParaRPr sz="1800">
+            <a:endParaRPr sz="1800" dirty="0">
               <a:latin typeface="Arial MT"/>
               <a:cs typeface="Arial MT"/>
             </a:endParaRPr>
@@ -53683,7 +53985,7 @@
         </p:nvSpPr>
         <p:spPr>
           <a:xfrm>
-            <a:off x="410375" y="1480997"/>
+            <a:off x="410375" y="1230210"/>
             <a:ext cx="6452870" cy="406400"/>
           </a:xfrm>
           <a:prstGeom prst="rect">
@@ -53735,8 +54037,8 @@
         </p:nvSpPr>
         <p:spPr>
           <a:xfrm>
-            <a:off x="475925" y="2070281"/>
-            <a:ext cx="5336540" cy="4406719"/>
+            <a:off x="391073" y="1819494"/>
+            <a:ext cx="5628727" cy="4809906"/>
           </a:xfrm>
           <a:prstGeom prst="rect">
             <a:avLst/>
@@ -53764,244 +54066,244 @@
               </a:tabLst>
             </a:pPr>
             <a:r>
-              <a:rPr sz="1600" dirty="0">
+              <a:rPr dirty="0">
                 <a:latin typeface="Arial MT"/>
                 <a:cs typeface="Arial MT"/>
               </a:rPr>
               <a:t>The</a:t>
             </a:r>
             <a:r>
-              <a:rPr sz="1600" spc="-30" dirty="0">
-                <a:latin typeface="Arial MT"/>
-                <a:cs typeface="Arial MT"/>
-              </a:rPr>
-              <a:t> </a:t>
-            </a:r>
-            <a:r>
-              <a:rPr sz="1600" b="1" dirty="0">
+              <a:rPr spc="-30" dirty="0">
+                <a:latin typeface="Arial MT"/>
+                <a:cs typeface="Arial MT"/>
+              </a:rPr>
+              <a:t> </a:t>
+            </a:r>
+            <a:r>
+              <a:rPr b="1" dirty="0">
                 <a:latin typeface="Arial"/>
                 <a:cs typeface="Arial"/>
               </a:rPr>
               <a:t>implicit</a:t>
             </a:r>
             <a:r>
-              <a:rPr sz="1600" b="1" spc="-30" dirty="0">
+              <a:rPr b="1" spc="-30" dirty="0">
                 <a:latin typeface="Arial"/>
                 <a:cs typeface="Arial"/>
               </a:rPr>
               <a:t> </a:t>
             </a:r>
             <a:r>
-              <a:rPr sz="1600" b="1" dirty="0">
+              <a:rPr b="1" dirty="0">
                 <a:latin typeface="Arial"/>
                 <a:cs typeface="Arial"/>
               </a:rPr>
               <a:t>free</a:t>
             </a:r>
             <a:r>
-              <a:rPr sz="1600" b="1" spc="-25" dirty="0">
+              <a:rPr b="1" spc="-25" dirty="0">
                 <a:latin typeface="Arial"/>
                 <a:cs typeface="Arial"/>
               </a:rPr>
               <a:t> </a:t>
             </a:r>
             <a:r>
-              <a:rPr sz="1600" b="1" dirty="0">
+              <a:rPr b="1" dirty="0">
                 <a:latin typeface="Arial"/>
                 <a:cs typeface="Arial"/>
               </a:rPr>
               <a:t>list</a:t>
             </a:r>
             <a:r>
-              <a:rPr sz="1600" b="1" spc="-30" dirty="0">
+              <a:rPr b="1" spc="-30" dirty="0">
                 <a:latin typeface="Arial"/>
                 <a:cs typeface="Arial"/>
               </a:rPr>
               <a:t> </a:t>
             </a:r>
             <a:r>
-              <a:rPr sz="1600" dirty="0">
+              <a:rPr dirty="0">
                 <a:latin typeface="Arial MT"/>
                 <a:cs typeface="Arial MT"/>
               </a:rPr>
               <a:t>is</a:t>
             </a:r>
             <a:r>
-              <a:rPr sz="1600" spc="-30" dirty="0">
-                <a:latin typeface="Arial MT"/>
-                <a:cs typeface="Arial MT"/>
-              </a:rPr>
-              <a:t> </a:t>
-            </a:r>
-            <a:r>
-              <a:rPr sz="1600" dirty="0">
+              <a:rPr spc="-30" dirty="0">
+                <a:latin typeface="Arial MT"/>
+                <a:cs typeface="Arial MT"/>
+              </a:rPr>
+              <a:t> </a:t>
+            </a:r>
+            <a:r>
+              <a:rPr dirty="0">
                 <a:latin typeface="Arial MT"/>
                 <a:cs typeface="Arial MT"/>
               </a:rPr>
               <a:t>a</a:t>
             </a:r>
             <a:r>
-              <a:rPr sz="1600" spc="-25" dirty="0">
-                <a:latin typeface="Arial MT"/>
-                <a:cs typeface="Arial MT"/>
-              </a:rPr>
-              <a:t> </a:t>
-            </a:r>
-            <a:r>
-              <a:rPr sz="1600" dirty="0">
+              <a:rPr spc="-25" dirty="0">
+                <a:latin typeface="Arial MT"/>
+                <a:cs typeface="Arial MT"/>
+              </a:rPr>
+              <a:t> </a:t>
+            </a:r>
+            <a:r>
+              <a:rPr dirty="0">
                 <a:latin typeface="Arial MT"/>
                 <a:cs typeface="Arial MT"/>
               </a:rPr>
               <a:t>simple</a:t>
             </a:r>
             <a:r>
-              <a:rPr sz="1600" spc="-30" dirty="0">
-                <a:latin typeface="Arial MT"/>
-                <a:cs typeface="Arial MT"/>
-              </a:rPr>
-              <a:t> </a:t>
-            </a:r>
-            <a:r>
-              <a:rPr sz="1600" dirty="0">
+              <a:rPr spc="-30" dirty="0">
+                <a:latin typeface="Arial MT"/>
+                <a:cs typeface="Arial MT"/>
+              </a:rPr>
+              <a:t> </a:t>
+            </a:r>
+            <a:r>
+              <a:rPr dirty="0">
                 <a:latin typeface="Arial MT"/>
                 <a:cs typeface="Arial MT"/>
               </a:rPr>
               <a:t>way</a:t>
             </a:r>
             <a:r>
-              <a:rPr sz="1600" spc="-30" dirty="0">
-                <a:latin typeface="Arial MT"/>
-                <a:cs typeface="Arial MT"/>
-              </a:rPr>
-              <a:t> </a:t>
-            </a:r>
-            <a:r>
-              <a:rPr sz="1600" dirty="0">
+              <a:rPr spc="-30" dirty="0">
+                <a:latin typeface="Arial MT"/>
+                <a:cs typeface="Arial MT"/>
+              </a:rPr>
+              <a:t> </a:t>
+            </a:r>
+            <a:r>
+              <a:rPr dirty="0">
                 <a:latin typeface="Arial MT"/>
                 <a:cs typeface="Arial MT"/>
               </a:rPr>
               <a:t>to</a:t>
             </a:r>
             <a:r>
-              <a:rPr sz="1600" spc="-25" dirty="0">
-                <a:latin typeface="Arial MT"/>
-                <a:cs typeface="Arial MT"/>
-              </a:rPr>
-              <a:t> </a:t>
-            </a:r>
-            <a:r>
-              <a:rPr sz="1600" dirty="0">
+              <a:rPr spc="-25" dirty="0">
+                <a:latin typeface="Arial MT"/>
+                <a:cs typeface="Arial MT"/>
+              </a:rPr>
+              <a:t> </a:t>
+            </a:r>
+            <a:r>
+              <a:rPr dirty="0">
                 <a:latin typeface="Arial MT"/>
                 <a:cs typeface="Arial MT"/>
               </a:rPr>
               <a:t>track</a:t>
             </a:r>
             <a:r>
-              <a:rPr sz="1600" spc="-30" dirty="0">
-                <a:latin typeface="Arial MT"/>
-                <a:cs typeface="Arial MT"/>
-              </a:rPr>
-              <a:t> </a:t>
-            </a:r>
-            <a:r>
-              <a:rPr sz="1600" dirty="0">
+              <a:rPr spc="-30" dirty="0">
+                <a:latin typeface="Arial MT"/>
+                <a:cs typeface="Arial MT"/>
+              </a:rPr>
+              <a:t> </a:t>
+            </a:r>
+            <a:r>
+              <a:rPr dirty="0">
                 <a:latin typeface="Arial MT"/>
                 <a:cs typeface="Arial MT"/>
               </a:rPr>
               <a:t>free</a:t>
             </a:r>
             <a:r>
-              <a:rPr sz="1600" spc="-25" dirty="0">
+              <a:rPr spc="-25" dirty="0">
                 <a:latin typeface="Arial MT"/>
                 <a:cs typeface="Arial MT"/>
               </a:rPr>
               <a:t> and </a:t>
             </a:r>
             <a:r>
-              <a:rPr sz="1600" dirty="0">
+              <a:rPr dirty="0">
                 <a:latin typeface="Arial MT"/>
                 <a:cs typeface="Arial MT"/>
               </a:rPr>
               <a:t>allocated</a:t>
             </a:r>
             <a:r>
-              <a:rPr sz="1600" spc="-35" dirty="0">
-                <a:latin typeface="Arial MT"/>
-                <a:cs typeface="Arial MT"/>
-              </a:rPr>
-              <a:t> </a:t>
-            </a:r>
-            <a:r>
-              <a:rPr sz="1600" dirty="0">
+              <a:rPr spc="-35" dirty="0">
+                <a:latin typeface="Arial MT"/>
+                <a:cs typeface="Arial MT"/>
+              </a:rPr>
+              <a:t> </a:t>
+            </a:r>
+            <a:r>
+              <a:rPr dirty="0">
                 <a:latin typeface="Arial MT"/>
                 <a:cs typeface="Arial MT"/>
               </a:rPr>
               <a:t>memory</a:t>
             </a:r>
             <a:r>
-              <a:rPr sz="1600" spc="-30" dirty="0">
-                <a:latin typeface="Arial MT"/>
-                <a:cs typeface="Arial MT"/>
-              </a:rPr>
-              <a:t> </a:t>
-            </a:r>
-            <a:r>
-              <a:rPr sz="1600" dirty="0">
+              <a:rPr spc="-30" dirty="0">
+                <a:latin typeface="Arial MT"/>
+                <a:cs typeface="Arial MT"/>
+              </a:rPr>
+              <a:t> </a:t>
+            </a:r>
+            <a:r>
+              <a:rPr dirty="0">
                 <a:latin typeface="Arial MT"/>
                 <a:cs typeface="Arial MT"/>
               </a:rPr>
               <a:t>blocks</a:t>
             </a:r>
             <a:r>
-              <a:rPr sz="1600" spc="-30" dirty="0">
-                <a:latin typeface="Arial MT"/>
-                <a:cs typeface="Arial MT"/>
-              </a:rPr>
-              <a:t> </a:t>
-            </a:r>
-            <a:r>
-              <a:rPr sz="1600" dirty="0">
+              <a:rPr spc="-30" dirty="0">
+                <a:latin typeface="Arial MT"/>
+                <a:cs typeface="Arial MT"/>
+              </a:rPr>
+              <a:t> </a:t>
+            </a:r>
+            <a:r>
+              <a:rPr dirty="0">
                 <a:latin typeface="Arial MT"/>
                 <a:cs typeface="Arial MT"/>
               </a:rPr>
               <a:t>in</a:t>
             </a:r>
             <a:r>
-              <a:rPr sz="1600" spc="-30" dirty="0">
-                <a:latin typeface="Arial MT"/>
-                <a:cs typeface="Arial MT"/>
-              </a:rPr>
-              <a:t> </a:t>
-            </a:r>
-            <a:r>
-              <a:rPr sz="1600" b="1" dirty="0">
+              <a:rPr spc="-30" dirty="0">
+                <a:latin typeface="Arial MT"/>
+                <a:cs typeface="Arial MT"/>
+              </a:rPr>
+              <a:t> </a:t>
+            </a:r>
+            <a:r>
+              <a:rPr b="1" dirty="0">
                 <a:latin typeface="Arial"/>
                 <a:cs typeface="Arial"/>
               </a:rPr>
               <a:t>dynamic</a:t>
             </a:r>
             <a:r>
-              <a:rPr sz="1600" b="1" spc="-30" dirty="0">
+              <a:rPr b="1" spc="-30" dirty="0">
                 <a:latin typeface="Arial"/>
                 <a:cs typeface="Arial"/>
               </a:rPr>
               <a:t> </a:t>
             </a:r>
             <a:r>
-              <a:rPr sz="1600" b="1" spc="-10" dirty="0">
+              <a:rPr b="1" spc="-10" dirty="0">
                 <a:latin typeface="Arial"/>
                 <a:cs typeface="Arial"/>
               </a:rPr>
               <a:t>memory allocators</a:t>
             </a:r>
             <a:r>
-              <a:rPr sz="1600" spc="-10" dirty="0">
+              <a:rPr spc="-10" dirty="0">
                 <a:latin typeface="Arial MT"/>
                 <a:cs typeface="Arial MT"/>
               </a:rPr>
               <a:t>.</a:t>
             </a:r>
-            <a:endParaRPr sz="1600" dirty="0">
+            <a:endParaRPr dirty="0">
               <a:latin typeface="Arial MT"/>
               <a:cs typeface="Arial MT"/>
             </a:endParaRPr>
@@ -54020,146 +54322,146 @@
               </a:tabLst>
             </a:pPr>
             <a:r>
-              <a:rPr sz="1600" dirty="0">
+              <a:rPr dirty="0">
                 <a:latin typeface="Arial MT"/>
                 <a:cs typeface="Arial MT"/>
               </a:rPr>
               <a:t>Each</a:t>
             </a:r>
             <a:r>
-              <a:rPr sz="1600" spc="-25" dirty="0">
-                <a:latin typeface="Arial MT"/>
-                <a:cs typeface="Arial MT"/>
-              </a:rPr>
-              <a:t> </a:t>
-            </a:r>
-            <a:r>
-              <a:rPr sz="1600" dirty="0">
+              <a:rPr spc="-25" dirty="0">
+                <a:latin typeface="Arial MT"/>
+                <a:cs typeface="Arial MT"/>
+              </a:rPr>
+              <a:t> </a:t>
+            </a:r>
+            <a:r>
+              <a:rPr dirty="0">
                 <a:latin typeface="Arial MT"/>
                 <a:cs typeface="Arial MT"/>
               </a:rPr>
               <a:t>block</a:t>
             </a:r>
             <a:r>
-              <a:rPr sz="1600" spc="-25" dirty="0">
-                <a:latin typeface="Arial MT"/>
-                <a:cs typeface="Arial MT"/>
-              </a:rPr>
-              <a:t> </a:t>
-            </a:r>
-            <a:r>
-              <a:rPr sz="1600" dirty="0">
+              <a:rPr spc="-25" dirty="0">
+                <a:latin typeface="Arial MT"/>
+                <a:cs typeface="Arial MT"/>
+              </a:rPr>
+              <a:t> </a:t>
+            </a:r>
+            <a:r>
+              <a:rPr dirty="0">
                 <a:latin typeface="Arial MT"/>
                 <a:cs typeface="Arial MT"/>
               </a:rPr>
               <a:t>contains</a:t>
             </a:r>
             <a:r>
-              <a:rPr sz="1600" spc="-20" dirty="0">
-                <a:latin typeface="Arial MT"/>
-                <a:cs typeface="Arial MT"/>
-              </a:rPr>
-              <a:t> </a:t>
-            </a:r>
-            <a:r>
-              <a:rPr sz="1600" b="1" dirty="0">
+              <a:rPr spc="-20" dirty="0">
+                <a:latin typeface="Arial MT"/>
+                <a:cs typeface="Arial MT"/>
+              </a:rPr>
+              <a:t> </a:t>
+            </a:r>
+            <a:r>
+              <a:rPr b="1" dirty="0">
                 <a:latin typeface="Arial"/>
                 <a:cs typeface="Arial"/>
               </a:rPr>
               <a:t>a</a:t>
             </a:r>
             <a:r>
-              <a:rPr sz="1600" b="1" spc="-20" dirty="0">
+              <a:rPr b="1" spc="-20" dirty="0">
                 <a:latin typeface="Arial"/>
                 <a:cs typeface="Arial"/>
               </a:rPr>
               <a:t> </a:t>
             </a:r>
             <a:r>
-              <a:rPr sz="1600" b="1" dirty="0">
+              <a:rPr b="1" dirty="0">
                 <a:latin typeface="Arial"/>
                 <a:cs typeface="Arial"/>
               </a:rPr>
               <a:t>header</a:t>
             </a:r>
             <a:r>
-              <a:rPr sz="1600" b="1" spc="-25" dirty="0">
+              <a:rPr b="1" spc="-25" dirty="0">
                 <a:latin typeface="Arial"/>
                 <a:cs typeface="Arial"/>
               </a:rPr>
               <a:t> </a:t>
             </a:r>
             <a:r>
-              <a:rPr sz="1600" dirty="0">
+              <a:rPr dirty="0">
                 <a:latin typeface="Arial MT"/>
                 <a:cs typeface="Arial MT"/>
               </a:rPr>
               <a:t>storing</a:t>
             </a:r>
             <a:r>
-              <a:rPr sz="1600" spc="-25" dirty="0">
-                <a:latin typeface="Arial MT"/>
-                <a:cs typeface="Arial MT"/>
-              </a:rPr>
-              <a:t> </a:t>
-            </a:r>
-            <a:r>
-              <a:rPr sz="1600" dirty="0">
+              <a:rPr spc="-25" dirty="0">
+                <a:latin typeface="Arial MT"/>
+                <a:cs typeface="Arial MT"/>
+              </a:rPr>
+              <a:t> </a:t>
+            </a:r>
+            <a:r>
+              <a:rPr dirty="0">
                 <a:latin typeface="Arial MT"/>
                 <a:cs typeface="Arial MT"/>
               </a:rPr>
               <a:t>the</a:t>
             </a:r>
             <a:r>
-              <a:rPr sz="1600" spc="-15" dirty="0">
-                <a:latin typeface="Arial MT"/>
-                <a:cs typeface="Arial MT"/>
-              </a:rPr>
-              <a:t> </a:t>
-            </a:r>
-            <a:r>
-              <a:rPr sz="1600" b="1" dirty="0">
+              <a:rPr spc="-15" dirty="0">
+                <a:latin typeface="Arial MT"/>
+                <a:cs typeface="Arial MT"/>
+              </a:rPr>
+              <a:t> </a:t>
+            </a:r>
+            <a:r>
+              <a:rPr b="1" dirty="0">
                 <a:latin typeface="Arial"/>
                 <a:cs typeface="Arial"/>
               </a:rPr>
               <a:t>size</a:t>
             </a:r>
             <a:r>
-              <a:rPr sz="1600" b="1" spc="-25" dirty="0">
+              <a:rPr b="1" spc="-25" dirty="0">
                 <a:latin typeface="Arial"/>
                 <a:cs typeface="Arial"/>
               </a:rPr>
               <a:t> and </a:t>
             </a:r>
             <a:r>
-              <a:rPr sz="1600" b="1" spc="-10" dirty="0">
+              <a:rPr b="1" spc="-10" dirty="0">
                 <a:latin typeface="Arial"/>
                 <a:cs typeface="Arial"/>
               </a:rPr>
               <a:t>allocation</a:t>
             </a:r>
             <a:r>
-              <a:rPr sz="1600" b="1" spc="-25" dirty="0">
+              <a:rPr b="1" spc="-25" dirty="0">
                 <a:latin typeface="Arial"/>
                 <a:cs typeface="Arial"/>
               </a:rPr>
               <a:t> </a:t>
             </a:r>
             <a:r>
-              <a:rPr sz="1600" b="1" spc="-10" dirty="0">
+              <a:rPr b="1" spc="-10" dirty="0">
                 <a:latin typeface="Arial"/>
                 <a:cs typeface="Arial"/>
               </a:rPr>
               <a:t>status</a:t>
             </a:r>
             <a:r>
-              <a:rPr sz="1600" spc="-10" dirty="0">
+              <a:rPr spc="-10" dirty="0">
                 <a:latin typeface="Arial MT"/>
                 <a:cs typeface="Arial MT"/>
               </a:rPr>
               <a:t>.</a:t>
             </a:r>
-            <a:endParaRPr sz="1600" dirty="0">
+            <a:endParaRPr dirty="0">
               <a:latin typeface="Arial MT"/>
               <a:cs typeface="Arial MT"/>
             </a:endParaRPr>
@@ -54169,159 +54471,148 @@
               <a:lnSpc>
                 <a:spcPct val="114000"/>
               </a:lnSpc>
+              <a:spcAft>
+                <a:spcPts val="1800"/>
+              </a:spcAft>
               <a:buChar char="●"/>
               <a:tabLst>
                 <a:tab pos="469900" algn="l"/>
               </a:tabLst>
             </a:pPr>
             <a:r>
-              <a:rPr sz="1600" dirty="0">
+              <a:rPr dirty="0">
                 <a:latin typeface="Arial MT"/>
                 <a:cs typeface="Arial MT"/>
               </a:rPr>
               <a:t>The</a:t>
             </a:r>
             <a:r>
-              <a:rPr sz="1600" spc="-25" dirty="0">
-                <a:latin typeface="Arial MT"/>
-                <a:cs typeface="Arial MT"/>
-              </a:rPr>
-              <a:t> </a:t>
-            </a:r>
-            <a:r>
-              <a:rPr sz="1600" dirty="0">
+              <a:rPr spc="-25" dirty="0">
+                <a:latin typeface="Arial MT"/>
+                <a:cs typeface="Arial MT"/>
+              </a:rPr>
+              <a:t> </a:t>
+            </a:r>
+            <a:r>
+              <a:rPr dirty="0">
                 <a:latin typeface="Arial MT"/>
                 <a:cs typeface="Arial MT"/>
               </a:rPr>
               <a:t>allocator</a:t>
             </a:r>
             <a:r>
-              <a:rPr sz="1600" spc="-20" dirty="0">
-                <a:latin typeface="Arial MT"/>
-                <a:cs typeface="Arial MT"/>
-              </a:rPr>
-              <a:t> </a:t>
-            </a:r>
-            <a:r>
-              <a:rPr sz="1600" b="1" dirty="0">
+              <a:rPr spc="-20" dirty="0">
+                <a:latin typeface="Arial MT"/>
+                <a:cs typeface="Arial MT"/>
+              </a:rPr>
+              <a:t> </a:t>
+            </a:r>
+            <a:r>
+              <a:rPr b="1" dirty="0">
                 <a:latin typeface="Arial"/>
                 <a:cs typeface="Arial"/>
               </a:rPr>
               <a:t>traverses</a:t>
             </a:r>
             <a:r>
-              <a:rPr sz="1600" b="1" spc="-25" dirty="0">
+              <a:rPr b="1" spc="-25" dirty="0">
                 <a:latin typeface="Arial"/>
                 <a:cs typeface="Arial"/>
               </a:rPr>
               <a:t> </a:t>
             </a:r>
             <a:r>
-              <a:rPr sz="1600" b="1" dirty="0">
+              <a:rPr b="1" dirty="0">
                 <a:latin typeface="Arial"/>
                 <a:cs typeface="Arial"/>
               </a:rPr>
               <a:t>the</a:t>
             </a:r>
             <a:r>
-              <a:rPr sz="1600" b="1" spc="-20" dirty="0">
+              <a:rPr b="1" spc="-20" dirty="0">
                 <a:latin typeface="Arial"/>
                 <a:cs typeface="Arial"/>
               </a:rPr>
               <a:t> </a:t>
             </a:r>
             <a:r>
-              <a:rPr sz="1600" b="1" dirty="0">
+              <a:rPr b="1" dirty="0">
                 <a:latin typeface="Arial"/>
                 <a:cs typeface="Arial"/>
               </a:rPr>
               <a:t>heap</a:t>
             </a:r>
             <a:r>
-              <a:rPr sz="1600" b="1" spc="-25" dirty="0">
+              <a:rPr b="1" spc="-25" dirty="0">
                 <a:latin typeface="Arial"/>
                 <a:cs typeface="Arial"/>
               </a:rPr>
               <a:t> </a:t>
             </a:r>
             <a:r>
-              <a:rPr sz="1600" b="1" spc="-10" dirty="0">
+              <a:rPr b="1" spc="-10" dirty="0">
                 <a:latin typeface="Arial"/>
                 <a:cs typeface="Arial"/>
               </a:rPr>
               <a:t>sequentially </a:t>
             </a:r>
             <a:r>
-              <a:rPr sz="1600" spc="-20" dirty="0">
+              <a:rPr spc="-20" dirty="0">
                 <a:latin typeface="Arial MT"/>
                 <a:cs typeface="Arial MT"/>
               </a:rPr>
               <a:t>when </a:t>
             </a:r>
             <a:r>
-              <a:rPr sz="1600" dirty="0">
+              <a:rPr dirty="0">
                 <a:latin typeface="Arial MT"/>
                 <a:cs typeface="Arial MT"/>
               </a:rPr>
               <a:t>searching</a:t>
             </a:r>
             <a:r>
-              <a:rPr sz="1600" spc="-40" dirty="0">
-                <a:latin typeface="Arial MT"/>
-                <a:cs typeface="Arial MT"/>
-              </a:rPr>
-              <a:t> </a:t>
-            </a:r>
-            <a:r>
-              <a:rPr sz="1600" dirty="0">
+              <a:rPr spc="-40" dirty="0">
+                <a:latin typeface="Arial MT"/>
+                <a:cs typeface="Arial MT"/>
+              </a:rPr>
+              <a:t> </a:t>
+            </a:r>
+            <a:r>
+              <a:rPr dirty="0">
                 <a:latin typeface="Arial MT"/>
                 <a:cs typeface="Arial MT"/>
               </a:rPr>
               <a:t>for</a:t>
             </a:r>
             <a:r>
-              <a:rPr sz="1600" spc="-40" dirty="0">
-                <a:latin typeface="Arial MT"/>
-                <a:cs typeface="Arial MT"/>
-              </a:rPr>
-              <a:t> </a:t>
-            </a:r>
-            <a:r>
-              <a:rPr sz="1600" dirty="0">
+              <a:rPr spc="-40" dirty="0">
+                <a:latin typeface="Arial MT"/>
+                <a:cs typeface="Arial MT"/>
+              </a:rPr>
+              <a:t> </a:t>
+            </a:r>
+            <a:r>
+              <a:rPr dirty="0">
                 <a:latin typeface="Arial MT"/>
                 <a:cs typeface="Arial MT"/>
               </a:rPr>
               <a:t>free</a:t>
             </a:r>
             <a:r>
-              <a:rPr sz="1600" spc="-40" dirty="0">
-                <a:latin typeface="Arial MT"/>
-                <a:cs typeface="Arial MT"/>
-              </a:rPr>
-              <a:t> </a:t>
-            </a:r>
-            <a:r>
-              <a:rPr sz="1600" spc="-10" dirty="0">
+              <a:rPr spc="-40" dirty="0">
+                <a:latin typeface="Arial MT"/>
+                <a:cs typeface="Arial MT"/>
+              </a:rPr>
+              <a:t> </a:t>
+            </a:r>
+            <a:r>
+              <a:rPr spc="-10" dirty="0">
                 <a:latin typeface="Arial MT"/>
                 <a:cs typeface="Arial MT"/>
               </a:rPr>
               <a:t>blocks.</a:t>
             </a:r>
-            <a:endParaRPr sz="1600" dirty="0">
-              <a:latin typeface="Arial MT"/>
-              <a:cs typeface="Arial MT"/>
-            </a:endParaRPr>
-          </a:p>
-          <a:p>
-            <a:pPr>
-              <a:lnSpc>
-                <a:spcPct val="114000"/>
-              </a:lnSpc>
-              <a:spcBef>
-                <a:spcPts val="15"/>
-              </a:spcBef>
-            </a:pPr>
-            <a:endParaRPr sz="1600" dirty="0">
+            <a:endParaRPr dirty="0">
               <a:latin typeface="Arial MT"/>
               <a:cs typeface="Arial MT"/>
             </a:endParaRPr>
@@ -54336,55 +54627,55 @@
               </a:spcAft>
             </a:pPr>
             <a:r>
-              <a:rPr sz="1600" dirty="0">
+              <a:rPr dirty="0">
                 <a:latin typeface="Arial MT"/>
                 <a:cs typeface="Arial MT"/>
               </a:rPr>
               <a:t>Each</a:t>
             </a:r>
             <a:r>
-              <a:rPr sz="1600" spc="-20" dirty="0">
-                <a:latin typeface="Arial MT"/>
-                <a:cs typeface="Arial MT"/>
-              </a:rPr>
-              <a:t> </a:t>
-            </a:r>
-            <a:r>
-              <a:rPr sz="1600" dirty="0">
+              <a:rPr spc="-20" dirty="0">
+                <a:latin typeface="Arial MT"/>
+                <a:cs typeface="Arial MT"/>
+              </a:rPr>
+              <a:t> </a:t>
+            </a:r>
+            <a:r>
+              <a:rPr dirty="0">
                 <a:latin typeface="Arial MT"/>
                 <a:cs typeface="Arial MT"/>
               </a:rPr>
               <a:t>block</a:t>
             </a:r>
             <a:r>
-              <a:rPr sz="1600" spc="-10" dirty="0">
-                <a:latin typeface="Arial MT"/>
-                <a:cs typeface="Arial MT"/>
-              </a:rPr>
-              <a:t> </a:t>
-            </a:r>
-            <a:r>
-              <a:rPr sz="1600" dirty="0">
+              <a:rPr spc="-10" dirty="0">
+                <a:latin typeface="Arial MT"/>
+                <a:cs typeface="Arial MT"/>
+              </a:rPr>
+              <a:t> </a:t>
+            </a:r>
+            <a:r>
+              <a:rPr dirty="0">
                 <a:latin typeface="Arial MT"/>
                 <a:cs typeface="Arial MT"/>
               </a:rPr>
               <a:t>consists</a:t>
             </a:r>
             <a:r>
-              <a:rPr sz="1600" spc="-10" dirty="0">
-                <a:latin typeface="Arial MT"/>
-                <a:cs typeface="Arial MT"/>
-              </a:rPr>
-              <a:t> </a:t>
-            </a:r>
-            <a:r>
-              <a:rPr sz="1600" spc="-25" dirty="0">
+              <a:rPr spc="-10" dirty="0">
+                <a:latin typeface="Arial MT"/>
+                <a:cs typeface="Arial MT"/>
+              </a:rPr>
+              <a:t> </a:t>
+            </a:r>
+            <a:r>
+              <a:rPr spc="-25" dirty="0">
                 <a:latin typeface="Arial MT"/>
                 <a:cs typeface="Arial MT"/>
               </a:rPr>
               <a:t>of:</a:t>
             </a:r>
-            <a:endParaRPr lang="en-US" sz="1600" spc="-25" dirty="0">
+            <a:endParaRPr lang="en-US" spc="-25" dirty="0">
               <a:latin typeface="Arial MT"/>
               <a:cs typeface="Arial MT"/>
             </a:endParaRPr>
@@ -54407,139 +54698,139 @@
               </a:tabLst>
             </a:pPr>
             <a:r>
-              <a:rPr lang="en-US" sz="1600" b="1" dirty="0">
+              <a:rPr lang="en-US" b="1" dirty="0">
                 <a:latin typeface="Arial"/>
                 <a:cs typeface="Arial"/>
               </a:rPr>
               <a:t>Header</a:t>
             </a:r>
             <a:r>
-              <a:rPr lang="en-US" sz="1600" dirty="0">
+              <a:rPr lang="en-US" dirty="0">
                 <a:latin typeface="Arial MT"/>
                 <a:cs typeface="Arial MT"/>
               </a:rPr>
               <a:t>:</a:t>
             </a:r>
             <a:r>
-              <a:rPr lang="en-US" sz="1600" spc="-35" dirty="0">
-                <a:latin typeface="Arial MT"/>
-                <a:cs typeface="Arial MT"/>
-              </a:rPr>
-              <a:t> </a:t>
-            </a:r>
-            <a:r>
-              <a:rPr lang="en-US" sz="1600" dirty="0">
+              <a:rPr lang="en-US" spc="-35" dirty="0">
+                <a:latin typeface="Arial MT"/>
+                <a:cs typeface="Arial MT"/>
+              </a:rPr>
+              <a:t> </a:t>
+            </a:r>
+            <a:r>
+              <a:rPr lang="en-US" dirty="0">
                 <a:latin typeface="Arial MT"/>
                 <a:cs typeface="Arial MT"/>
               </a:rPr>
               <a:t>Contains</a:t>
             </a:r>
             <a:r>
-              <a:rPr lang="en-US" sz="1600" spc="-35" dirty="0">
-                <a:latin typeface="Arial MT"/>
-                <a:cs typeface="Arial MT"/>
-              </a:rPr>
-              <a:t> </a:t>
-            </a:r>
-            <a:r>
-              <a:rPr lang="en-US" sz="1600" dirty="0">
+              <a:rPr lang="en-US" spc="-35" dirty="0">
+                <a:latin typeface="Arial MT"/>
+                <a:cs typeface="Arial MT"/>
+              </a:rPr>
+              <a:t> </a:t>
+            </a:r>
+            <a:r>
+              <a:rPr lang="en-US" dirty="0">
                 <a:latin typeface="Arial MT"/>
                 <a:cs typeface="Arial MT"/>
               </a:rPr>
               <a:t>metadata</a:t>
             </a:r>
             <a:r>
-              <a:rPr lang="en-US" sz="1600" spc="-30" dirty="0">
-                <a:latin typeface="Arial MT"/>
-                <a:cs typeface="Arial MT"/>
-              </a:rPr>
-              <a:t> </a:t>
-            </a:r>
-            <a:r>
-              <a:rPr lang="en-US" sz="1600" dirty="0">
+              <a:rPr lang="en-US" spc="-30" dirty="0">
+                <a:latin typeface="Arial MT"/>
+                <a:cs typeface="Arial MT"/>
+              </a:rPr>
+              <a:t> </a:t>
+            </a:r>
+            <a:r>
+              <a:rPr lang="en-US" dirty="0">
                 <a:latin typeface="Arial MT"/>
                 <a:cs typeface="Arial MT"/>
               </a:rPr>
               <a:t>such</a:t>
             </a:r>
             <a:r>
-              <a:rPr lang="en-US" sz="1600" spc="-35" dirty="0">
-                <a:latin typeface="Arial MT"/>
-                <a:cs typeface="Arial MT"/>
-              </a:rPr>
-              <a:t> </a:t>
-            </a:r>
-            <a:r>
-              <a:rPr lang="en-US" sz="1600" dirty="0">
+              <a:rPr lang="en-US" spc="-35" dirty="0">
+                <a:latin typeface="Arial MT"/>
+                <a:cs typeface="Arial MT"/>
+              </a:rPr>
+              <a:t> </a:t>
+            </a:r>
+            <a:r>
+              <a:rPr lang="en-US" dirty="0">
                 <a:latin typeface="Arial MT"/>
                 <a:cs typeface="Arial MT"/>
               </a:rPr>
               <a:t>as</a:t>
             </a:r>
             <a:r>
-              <a:rPr lang="en-US" sz="1600" spc="-35" dirty="0">
-                <a:latin typeface="Arial MT"/>
-                <a:cs typeface="Arial MT"/>
-              </a:rPr>
-              <a:t> </a:t>
-            </a:r>
-            <a:r>
-              <a:rPr lang="en-US" sz="1600" dirty="0">
+              <a:rPr lang="en-US" spc="-35" dirty="0">
+                <a:latin typeface="Arial MT"/>
+                <a:cs typeface="Arial MT"/>
+              </a:rPr>
+              <a:t> </a:t>
+            </a:r>
+            <a:r>
+              <a:rPr lang="en-US" dirty="0">
                 <a:latin typeface="Arial MT"/>
                 <a:cs typeface="Arial MT"/>
               </a:rPr>
               <a:t>the</a:t>
             </a:r>
             <a:r>
-              <a:rPr lang="en-US" sz="1600" spc="-30" dirty="0">
-                <a:latin typeface="Arial MT"/>
-                <a:cs typeface="Arial MT"/>
-              </a:rPr>
-              <a:t> </a:t>
-            </a:r>
-            <a:r>
-              <a:rPr lang="en-US" sz="1600" dirty="0">
+              <a:rPr lang="en-US" spc="-30" dirty="0">
+                <a:latin typeface="Arial MT"/>
+                <a:cs typeface="Arial MT"/>
+              </a:rPr>
+              <a:t> </a:t>
+            </a:r>
+            <a:r>
+              <a:rPr lang="en-US" dirty="0">
                 <a:latin typeface="Arial MT"/>
                 <a:cs typeface="Arial MT"/>
               </a:rPr>
               <a:t>size</a:t>
             </a:r>
             <a:r>
-              <a:rPr lang="en-US" sz="1600" spc="-35" dirty="0">
-                <a:latin typeface="Arial MT"/>
-                <a:cs typeface="Arial MT"/>
-              </a:rPr>
-              <a:t> </a:t>
-            </a:r>
-            <a:r>
-              <a:rPr lang="en-US" sz="1600" spc="-25" dirty="0">
+              <a:rPr lang="en-US" spc="-35" dirty="0">
+                <a:latin typeface="Arial MT"/>
+                <a:cs typeface="Arial MT"/>
+              </a:rPr>
+              <a:t> </a:t>
+            </a:r>
+            <a:r>
+              <a:rPr lang="en-US" spc="-25" dirty="0">
                 <a:latin typeface="Arial MT"/>
                 <a:cs typeface="Arial MT"/>
               </a:rPr>
               <a:t>and </a:t>
             </a:r>
             <a:r>
-              <a:rPr lang="en-US" sz="1600" dirty="0">
+              <a:rPr lang="en-US" dirty="0">
                 <a:latin typeface="Arial MT"/>
                 <a:cs typeface="Arial MT"/>
               </a:rPr>
               <a:t>allocation</a:t>
             </a:r>
             <a:r>
-              <a:rPr lang="en-US" sz="1600" spc="-50" dirty="0">
-                <a:latin typeface="Arial MT"/>
-                <a:cs typeface="Arial MT"/>
-              </a:rPr>
-              <a:t> </a:t>
-            </a:r>
-            <a:r>
-              <a:rPr lang="en-US" sz="1600" spc="-10" dirty="0">
+              <a:rPr lang="en-US" spc="-50" dirty="0">
+                <a:latin typeface="Arial MT"/>
+                <a:cs typeface="Arial MT"/>
+              </a:rPr>
+              <a:t> </a:t>
+            </a:r>
+            <a:r>
+              <a:rPr lang="en-US" spc="-10" dirty="0">
                 <a:latin typeface="Arial MT"/>
                 <a:cs typeface="Arial MT"/>
               </a:rPr>
               <a:t>status.</a:t>
             </a:r>
-            <a:endParaRPr lang="en-US" sz="1600" dirty="0">
+            <a:endParaRPr lang="en-US" dirty="0">
               <a:latin typeface="Arial MT"/>
               <a:cs typeface="Arial MT"/>
             </a:endParaRPr>
@@ -54559,111 +54850,111 @@
               </a:tabLst>
             </a:pPr>
             <a:r>
-              <a:rPr lang="en-US" sz="1600" b="1" dirty="0">
+              <a:rPr lang="en-US" b="1" dirty="0">
                 <a:latin typeface="Arial"/>
                 <a:cs typeface="Arial"/>
               </a:rPr>
               <a:t>Payload</a:t>
             </a:r>
             <a:r>
-              <a:rPr lang="en-US" sz="1600" dirty="0">
+              <a:rPr lang="en-US" dirty="0">
                 <a:latin typeface="Arial MT"/>
                 <a:cs typeface="Arial MT"/>
               </a:rPr>
               <a:t>:</a:t>
             </a:r>
             <a:r>
-              <a:rPr lang="en-US" sz="1600" spc="-65" dirty="0">
-                <a:latin typeface="Arial MT"/>
-                <a:cs typeface="Arial MT"/>
-              </a:rPr>
-              <a:t> </a:t>
-            </a:r>
-            <a:r>
-              <a:rPr lang="en-US" sz="1600" dirty="0">
+              <a:rPr lang="en-US" spc="-65" dirty="0">
+                <a:latin typeface="Arial MT"/>
+                <a:cs typeface="Arial MT"/>
+              </a:rPr>
+              <a:t> </a:t>
+            </a:r>
+            <a:r>
+              <a:rPr lang="en-US" dirty="0">
                 <a:latin typeface="Arial MT"/>
                 <a:cs typeface="Arial MT"/>
               </a:rPr>
               <a:t>The</a:t>
             </a:r>
             <a:r>
-              <a:rPr lang="en-US" sz="1600" spc="-40" dirty="0">
-                <a:latin typeface="Arial MT"/>
-                <a:cs typeface="Arial MT"/>
-              </a:rPr>
-              <a:t> </a:t>
-            </a:r>
-            <a:r>
-              <a:rPr lang="en-US" sz="1600" dirty="0">
+              <a:rPr lang="en-US" spc="-40" dirty="0">
+                <a:latin typeface="Arial MT"/>
+                <a:cs typeface="Arial MT"/>
+              </a:rPr>
+              <a:t> </a:t>
+            </a:r>
+            <a:r>
+              <a:rPr lang="en-US" dirty="0">
                 <a:latin typeface="Arial MT"/>
                 <a:cs typeface="Arial MT"/>
               </a:rPr>
               <a:t>actual</a:t>
             </a:r>
             <a:r>
-              <a:rPr lang="en-US" sz="1600" spc="-35" dirty="0">
-                <a:latin typeface="Arial MT"/>
-                <a:cs typeface="Arial MT"/>
-              </a:rPr>
-              <a:t> </a:t>
-            </a:r>
-            <a:r>
-              <a:rPr lang="en-US" sz="1600" dirty="0">
+              <a:rPr lang="en-US" spc="-35" dirty="0">
+                <a:latin typeface="Arial MT"/>
+                <a:cs typeface="Arial MT"/>
+              </a:rPr>
+              <a:t> </a:t>
+            </a:r>
+            <a:r>
+              <a:rPr lang="en-US" dirty="0">
                 <a:latin typeface="Arial MT"/>
                 <a:cs typeface="Arial MT"/>
               </a:rPr>
               <a:t>memory</a:t>
             </a:r>
             <a:r>
-              <a:rPr lang="en-US" sz="1600" spc="-35" dirty="0">
-                <a:latin typeface="Arial MT"/>
-                <a:cs typeface="Arial MT"/>
-              </a:rPr>
-              <a:t> </a:t>
-            </a:r>
-            <a:r>
-              <a:rPr lang="en-US" sz="1600" dirty="0">
+              <a:rPr lang="en-US" spc="-35" dirty="0">
+                <a:latin typeface="Arial MT"/>
+                <a:cs typeface="Arial MT"/>
+              </a:rPr>
+              <a:t> </a:t>
+            </a:r>
+            <a:r>
+              <a:rPr lang="en-US" dirty="0">
                 <a:latin typeface="Arial MT"/>
                 <a:cs typeface="Arial MT"/>
               </a:rPr>
               <a:t>available</a:t>
             </a:r>
             <a:r>
-              <a:rPr lang="en-US" sz="1600" spc="-35" dirty="0">
-                <a:latin typeface="Arial MT"/>
-                <a:cs typeface="Arial MT"/>
-              </a:rPr>
-              <a:t> </a:t>
-            </a:r>
-            <a:r>
-              <a:rPr lang="en-US" sz="1600" dirty="0">
+              <a:rPr lang="en-US" spc="-35" dirty="0">
+                <a:latin typeface="Arial MT"/>
+                <a:cs typeface="Arial MT"/>
+              </a:rPr>
+              <a:t> </a:t>
+            </a:r>
+            <a:r>
+              <a:rPr lang="en-US" dirty="0">
                 <a:latin typeface="Arial MT"/>
                 <a:cs typeface="Arial MT"/>
               </a:rPr>
               <a:t>for</a:t>
             </a:r>
             <a:r>
-              <a:rPr lang="en-US" sz="1600" spc="-40" dirty="0">
-                <a:latin typeface="Arial MT"/>
-                <a:cs typeface="Arial MT"/>
-              </a:rPr>
-              <a:t> </a:t>
-            </a:r>
-            <a:r>
-              <a:rPr lang="en-US" sz="1600" spc="-20" dirty="0">
+              <a:rPr lang="en-US" spc="-40" dirty="0">
+                <a:latin typeface="Arial MT"/>
+                <a:cs typeface="Arial MT"/>
+              </a:rPr>
+              <a:t> </a:t>
+            </a:r>
+            <a:r>
+              <a:rPr lang="en-US" spc="-20" dirty="0">
                 <a:latin typeface="Arial MT"/>
                 <a:cs typeface="Arial MT"/>
               </a:rPr>
               <a:t>user </a:t>
             </a:r>
             <a:r>
-              <a:rPr lang="en-US" sz="1600" spc="-10" dirty="0">
+              <a:rPr lang="en-US" spc="-10" dirty="0">
                 <a:latin typeface="Arial MT"/>
                 <a:cs typeface="Arial MT"/>
               </a:rPr>
               <a:t>allocation.</a:t>
             </a:r>
-            <a:endParaRPr lang="en-US" sz="1600" dirty="0">
+            <a:endParaRPr lang="en-US" dirty="0">
               <a:latin typeface="Arial MT"/>
               <a:cs typeface="Arial MT"/>
             </a:endParaRPr>
@@ -54683,90 +54974,90 @@
               </a:tabLst>
             </a:pPr>
             <a:r>
-              <a:rPr lang="en-US" sz="1600" b="1" dirty="0">
+              <a:rPr lang="en-US" b="1" dirty="0">
                 <a:latin typeface="Arial"/>
                 <a:cs typeface="Arial"/>
               </a:rPr>
               <a:t>Optional</a:t>
             </a:r>
             <a:r>
-              <a:rPr lang="en-US" sz="1600" b="1" spc="-50" dirty="0">
+              <a:rPr lang="en-US" b="1" spc="-50" dirty="0">
                 <a:latin typeface="Arial"/>
                 <a:cs typeface="Arial"/>
               </a:rPr>
               <a:t> </a:t>
             </a:r>
             <a:r>
-              <a:rPr lang="en-US" sz="1600" b="1" dirty="0">
+              <a:rPr lang="en-US" b="1" dirty="0">
                 <a:latin typeface="Arial"/>
                 <a:cs typeface="Arial"/>
               </a:rPr>
               <a:t>Footer</a:t>
             </a:r>
             <a:r>
-              <a:rPr lang="en-US" sz="1600" dirty="0">
+              <a:rPr lang="en-US" dirty="0">
                 <a:latin typeface="Arial MT"/>
                 <a:cs typeface="Arial MT"/>
               </a:rPr>
               <a:t>:</a:t>
             </a:r>
             <a:r>
-              <a:rPr lang="en-US" sz="1600" spc="-50" dirty="0">
-                <a:latin typeface="Arial MT"/>
-                <a:cs typeface="Arial MT"/>
-              </a:rPr>
-              <a:t> </a:t>
-            </a:r>
-            <a:r>
-              <a:rPr lang="en-US" sz="1600" dirty="0">
+              <a:rPr lang="en-US" spc="-50" dirty="0">
+                <a:latin typeface="Arial MT"/>
+                <a:cs typeface="Arial MT"/>
+              </a:rPr>
+              <a:t> </a:t>
+            </a:r>
+            <a:r>
+              <a:rPr lang="en-US" dirty="0">
                 <a:latin typeface="Arial MT"/>
                 <a:cs typeface="Arial MT"/>
               </a:rPr>
               <a:t>Used</a:t>
             </a:r>
             <a:r>
-              <a:rPr lang="en-US" sz="1600" spc="-50" dirty="0">
-                <a:latin typeface="Arial MT"/>
-                <a:cs typeface="Arial MT"/>
-              </a:rPr>
-              <a:t> </a:t>
-            </a:r>
-            <a:r>
-              <a:rPr lang="en-US" sz="1600" dirty="0">
+              <a:rPr lang="en-US" spc="-50" dirty="0">
+                <a:latin typeface="Arial MT"/>
+                <a:cs typeface="Arial MT"/>
+              </a:rPr>
+              <a:t> </a:t>
+            </a:r>
+            <a:r>
+              <a:rPr lang="en-US" dirty="0">
                 <a:latin typeface="Arial MT"/>
                 <a:cs typeface="Arial MT"/>
               </a:rPr>
               <a:t>for</a:t>
             </a:r>
             <a:r>
-              <a:rPr lang="en-US" sz="1600" spc="-45" dirty="0">
-                <a:latin typeface="Arial MT"/>
-                <a:cs typeface="Arial MT"/>
-              </a:rPr>
-              <a:t> </a:t>
-            </a:r>
-            <a:r>
-              <a:rPr lang="en-US" sz="1600" dirty="0">
+              <a:rPr lang="en-US" spc="-45" dirty="0">
+                <a:latin typeface="Arial MT"/>
+                <a:cs typeface="Arial MT"/>
+              </a:rPr>
+              <a:t> </a:t>
+            </a:r>
+            <a:r>
+              <a:rPr lang="en-US" dirty="0">
                 <a:latin typeface="Arial MT"/>
                 <a:cs typeface="Arial MT"/>
               </a:rPr>
               <a:t>bidirectional</a:t>
             </a:r>
             <a:r>
-              <a:rPr lang="en-US" sz="1600" spc="-50" dirty="0">
-                <a:latin typeface="Arial MT"/>
-                <a:cs typeface="Arial MT"/>
-              </a:rPr>
-              <a:t> </a:t>
-            </a:r>
-            <a:r>
-              <a:rPr lang="en-US" sz="1600" spc="-10" dirty="0">
+              <a:rPr lang="en-US" spc="-50" dirty="0">
+                <a:latin typeface="Arial MT"/>
+                <a:cs typeface="Arial MT"/>
+              </a:rPr>
+              <a:t> </a:t>
+            </a:r>
+            <a:r>
+              <a:rPr lang="en-US" spc="-10" dirty="0">
                 <a:latin typeface="Arial MT"/>
                 <a:cs typeface="Arial MT"/>
               </a:rPr>
               <a:t>coalescing</a:t>
             </a:r>
-            <a:endParaRPr sz="1600" dirty="0">
+            <a:endParaRPr dirty="0">
               <a:latin typeface="Arial MT"/>
               <a:cs typeface="Arial MT"/>
             </a:endParaRPr>
@@ -54781,7 +55072,7 @@
         </p:nvGrpSpPr>
         <p:grpSpPr>
           <a:xfrm>
-            <a:off x="6040849" y="2955425"/>
+            <a:off x="6096000" y="2955425"/>
             <a:ext cx="5972175" cy="2632075"/>
             <a:chOff x="6040849" y="2955425"/>
             <a:chExt cx="5972175" cy="2632075"/>

--- a/Lecture Slides/16 - Free Block Management.pptx
+++ b/Lecture Slides/16 - Free Block Management.pptx
@@ -1274,6 +1274,71 @@
           <a:bodyPr/>
           <a:lstStyle/>
           <a:p>
+            <a:r>
+              <a:rPr lang="en-US" sz="1200" b="1" i="0" kern="1200" dirty="0">
+                <a:solidFill>
+                  <a:schemeClr val="tx1"/>
+                </a:solidFill>
+                <a:effectLst/>
+                <a:latin typeface="+mn-lt"/>
+                <a:ea typeface="+mn-ea"/>
+                <a:cs typeface="+mn-cs"/>
+              </a:rPr>
+              <a:t>Thrashing</a:t>
+            </a:r>
+            <a:r>
+              <a:rPr lang="en-US" sz="1200" b="0" i="0" kern="1200" dirty="0">
+                <a:solidFill>
+                  <a:schemeClr val="tx1"/>
+                </a:solidFill>
+                <a:effectLst/>
+                <a:latin typeface="+mn-lt"/>
+                <a:ea typeface="+mn-ea"/>
+                <a:cs typeface="+mn-cs"/>
+              </a:rPr>
+              <a:t> occurs when a system spends more time moving data between storage and memory than executing instructions. </a:t>
+            </a:r>
+          </a:p>
+          <a:p>
+            <a:endParaRPr lang="en-US" sz="1200" b="0" i="0" kern="1200" dirty="0">
+              <a:solidFill>
+                <a:schemeClr val="tx1"/>
+              </a:solidFill>
+              <a:effectLst/>
+              <a:latin typeface="+mn-lt"/>
+              <a:ea typeface="+mn-ea"/>
+              <a:cs typeface="+mn-cs"/>
+            </a:endParaRPr>
+          </a:p>
+          <a:p>
+            <a:r>
+              <a:rPr lang="en-US" sz="1200" b="0" i="0" kern="1200" dirty="0">
+                <a:solidFill>
+                  <a:schemeClr val="tx1"/>
+                </a:solidFill>
+                <a:effectLst/>
+                <a:latin typeface="+mn-lt"/>
+                <a:ea typeface="+mn-ea"/>
+                <a:cs typeface="+mn-cs"/>
+              </a:rPr>
+              <a:t>It can be defined as a severe performance breakdown where memory access patterns are so scattered or fragmented </a:t>
+            </a:r>
+          </a:p>
+          <a:p>
+            <a:r>
+              <a:rPr lang="en-US" sz="1200" b="0" i="0" kern="1200" dirty="0">
+                <a:solidFill>
+                  <a:schemeClr val="tx1"/>
+                </a:solidFill>
+                <a:effectLst/>
+                <a:latin typeface="+mn-lt"/>
+                <a:ea typeface="+mn-ea"/>
+                <a:cs typeface="+mn-cs"/>
+              </a:rPr>
+              <a:t>that the system cannot combine them into efficient, single-memory transactions.</a:t>
+            </a:r>
+          </a:p>
+          <a:p>
             <a:endParaRPr lang="en-US" dirty="0"/>
           </a:p>
         </p:txBody>
@@ -1359,96 +1424,88 @@
           <a:lstStyle/>
           <a:p>
             <a:r>
-              <a:rPr lang="en-US" b="1" dirty="0"/>
-              <a:t>Bidirectional Coalescing &amp; Boundary Tags</a:t>
-            </a:r>
-            <a:endParaRPr lang="en-US" dirty="0"/>
+              <a:rPr lang="en-US" dirty="0">
+                <a:effectLst/>
+              </a:rPr>
+              <a:t>A </a:t>
+            </a:r>
+            <a:r>
+              <a:rPr lang="en-US" sz="1200" b="1" i="0" kern="1200" dirty="0">
+                <a:solidFill>
+                  <a:schemeClr val="tx1"/>
+                </a:solidFill>
+                <a:effectLst/>
+                <a:latin typeface="+mn-lt"/>
+                <a:ea typeface="+mn-ea"/>
+                <a:cs typeface="+mn-cs"/>
+              </a:rPr>
+              <a:t>logical barrier</a:t>
+            </a:r>
+            <a:r>
+              <a:rPr lang="en-US" sz="1200" b="0" i="0" kern="1200" dirty="0">
+                <a:solidFill>
+                  <a:schemeClr val="tx1"/>
+                </a:solidFill>
+                <a:effectLst/>
+                <a:latin typeface="+mn-lt"/>
+                <a:ea typeface="+mn-ea"/>
+                <a:cs typeface="+mn-cs"/>
+              </a:rPr>
+              <a:t> (often implemented via boundary tags) refers to </a:t>
+            </a:r>
           </a:p>
           <a:p>
-            <a:pPr marL="171450" indent="-171450">
-              <a:buFont typeface="Arial" panose="020B0604020202020204" pitchFamily="34" charset="0"/>
-              <a:buChar char="•"/>
-            </a:pPr>
-            <a:r>
-              <a:rPr lang="en-US" b="1" dirty="0"/>
-              <a:t>Challenge:</a:t>
-            </a:r>
-            <a:r>
-              <a:rPr lang="en-US" dirty="0"/>
-              <a:t> </a:t>
-            </a:r>
-            <a:br>
-              <a:rPr lang="en-US" dirty="0"/>
-            </a:br>
-            <a:r>
-              <a:rPr lang="en-US" dirty="0"/>
-              <a:t>Coalescing with the </a:t>
-            </a:r>
-            <a:r>
-              <a:rPr lang="en-US" i="1" dirty="0"/>
-              <a:t>next</a:t>
-            </a:r>
-            <a:r>
-              <a:rPr lang="en-US" dirty="0"/>
-              <a:t> block is easy (forward search), </a:t>
-            </a:r>
-            <a:br>
-              <a:rPr lang="en-US" dirty="0"/>
-            </a:br>
-            <a:r>
-              <a:rPr lang="en-US" dirty="0"/>
-              <a:t>but finding the </a:t>
-            </a:r>
-            <a:r>
-              <a:rPr lang="en-US" i="1" dirty="0"/>
-              <a:t>previous</a:t>
-            </a:r>
-            <a:r>
-              <a:rPr lang="en-US" dirty="0"/>
-              <a:t> block's start and status is difficult.</a:t>
-            </a:r>
-            <a:br>
-              <a:rPr lang="en-US" dirty="0"/>
-            </a:br>
-            <a:endParaRPr lang="en-US" dirty="0"/>
+            <a:r>
+              <a:rPr lang="en-US" sz="1200" b="0" i="0" kern="1200" dirty="0">
+                <a:solidFill>
+                  <a:schemeClr val="tx1"/>
+                </a:solidFill>
+                <a:effectLst/>
+                <a:latin typeface="+mn-lt"/>
+                <a:ea typeface="+mn-ea"/>
+                <a:cs typeface="+mn-cs"/>
+              </a:rPr>
+              <a:t>the structural separation maintained between contiguous memory blocks </a:t>
+            </a:r>
           </a:p>
           <a:p>
-            <a:pPr marL="171450" indent="-171450">
-              <a:buFont typeface="Arial" panose="020B0604020202020204" pitchFamily="34" charset="0"/>
-              <a:buChar char="•"/>
-            </a:pPr>
-            <a:r>
-              <a:rPr lang="en-US" b="1" dirty="0"/>
-              <a:t>Solution:</a:t>
-            </a:r>
-            <a:r>
-              <a:rPr lang="en-US" dirty="0"/>
-              <a:t> </a:t>
-            </a:r>
-            <a:br>
-              <a:rPr lang="en-US" dirty="0"/>
-            </a:br>
-            <a:r>
-              <a:rPr lang="en-US" dirty="0"/>
-              <a:t>Replicate the header as a "footer" at the end of the block.</a:t>
-            </a:r>
-            <a:br>
-              <a:rPr lang="en-US" dirty="0"/>
-            </a:br>
-            <a:r>
-              <a:rPr lang="en-US" dirty="0"/>
-              <a:t>Together, header and footer are "boundary tags," </a:t>
-            </a:r>
-            <a:br>
-              <a:rPr lang="en-US" dirty="0"/>
-            </a:br>
-            <a:r>
-              <a:rPr lang="en-US" dirty="0"/>
-              <a:t>allowing the allocator to traverse memory both forward and backward.</a:t>
+            <a:r>
+              <a:rPr lang="en-US" sz="1200" b="0" i="0" kern="1200" dirty="0">
+                <a:solidFill>
+                  <a:schemeClr val="tx1"/>
+                </a:solidFill>
+                <a:effectLst/>
+                <a:latin typeface="+mn-lt"/>
+                <a:ea typeface="+mn-ea"/>
+                <a:cs typeface="+mn-cs"/>
+              </a:rPr>
+              <a:t>that prevents the accidental merging of adjacent, but distinctly owned, free blocks, </a:t>
             </a:r>
           </a:p>
           <a:p>
-            <a:endParaRPr lang="en-US" dirty="0"/>
+            <a:r>
+              <a:rPr lang="en-US" sz="1200" b="0" i="0" kern="1200" dirty="0">
+                <a:solidFill>
+                  <a:schemeClr val="tx1"/>
+                </a:solidFill>
+                <a:effectLst/>
+                <a:latin typeface="+mn-lt"/>
+                <a:ea typeface="+mn-ea"/>
+                <a:cs typeface="+mn-cs"/>
+              </a:rPr>
+              <a:t>while enabling the coalescing of truly contiguous free spaces.</a:t>
+            </a:r>
+          </a:p>
+          <a:p>
+            <a:endParaRPr lang="en-US" sz="1200" b="0" i="0" kern="1200" dirty="0">
+              <a:solidFill>
+                <a:schemeClr val="tx1"/>
+              </a:solidFill>
+              <a:effectLst/>
+              <a:latin typeface="+mn-lt"/>
+              <a:ea typeface="+mn-ea"/>
+              <a:cs typeface="+mn-cs"/>
+            </a:endParaRPr>
           </a:p>
         </p:txBody>
       </p:sp>
@@ -1469,7 +1526,7 @@
           <a:p>
             <a:fld id="{AFAF0173-F4FC-4AFC-92E6-E8B88A3FF416}" type="slidenum">
               <a:rPr lang="en-US" smtClean="0"/>
-              <a:t>19</a:t>
+              <a:t>17</a:t>
             </a:fld>
             <a:endParaRPr lang="en-US"/>
           </a:p>
@@ -1478,7 +1535,7 @@
     </p:spTree>
     <p:extLst>
       <p:ext uri="{BB962C8B-B14F-4D97-AF65-F5344CB8AC3E}">
-        <p14:creationId xmlns:p14="http://schemas.microsoft.com/office/powerpoint/2010/main" val="3549130021"/>
+        <p14:creationId xmlns:p14="http://schemas.microsoft.com/office/powerpoint/2010/main" val="1422565559"/>
       </p:ext>
     </p:extLst>
   </p:cSld>
@@ -1533,8 +1590,92 @@
           <a:lstStyle/>
           <a:p>
             <a:r>
+              <a:rPr lang="en-US" b="1" dirty="0"/>
+              <a:t>Bidirectional Coalescing &amp; Boundary Tags</a:t>
+            </a:r>
+            <a:endParaRPr lang="en-US" dirty="0"/>
+          </a:p>
+          <a:p>
+            <a:pPr marL="171450" indent="-171450">
+              <a:buFont typeface="Arial" panose="020B0604020202020204" pitchFamily="34" charset="0"/>
+              <a:buChar char="•"/>
+            </a:pPr>
+            <a:r>
+              <a:rPr lang="en-US" b="1" dirty="0"/>
+              <a:t>Challenge:</a:t>
+            </a:r>
+            <a:r>
               <a:rPr lang="en-US" dirty="0"/>
-              <a:t>Bidirectional coalescing using headers and footers.</a:t>
+              <a:t> </a:t>
+            </a:r>
+            <a:br>
+              <a:rPr lang="en-US" dirty="0"/>
+            </a:br>
+            <a:r>
+              <a:rPr lang="en-US" dirty="0"/>
+              <a:t>Coalescing with the </a:t>
+            </a:r>
+            <a:r>
+              <a:rPr lang="en-US" i="1" dirty="0"/>
+              <a:t>next</a:t>
+            </a:r>
+            <a:r>
+              <a:rPr lang="en-US" dirty="0"/>
+              <a:t> block is easy (forward search), </a:t>
+            </a:r>
+            <a:br>
+              <a:rPr lang="en-US" dirty="0"/>
+            </a:br>
+            <a:r>
+              <a:rPr lang="en-US" dirty="0"/>
+              <a:t>but finding the </a:t>
+            </a:r>
+            <a:r>
+              <a:rPr lang="en-US" i="1" dirty="0"/>
+              <a:t>previous</a:t>
+            </a:r>
+            <a:r>
+              <a:rPr lang="en-US" dirty="0"/>
+              <a:t> block's start and status is difficult.</a:t>
+            </a:r>
+            <a:br>
+              <a:rPr lang="en-US" dirty="0"/>
+            </a:br>
+            <a:endParaRPr lang="en-US" dirty="0"/>
+          </a:p>
+          <a:p>
+            <a:pPr marL="171450" indent="-171450">
+              <a:buFont typeface="Arial" panose="020B0604020202020204" pitchFamily="34" charset="0"/>
+              <a:buChar char="•"/>
+            </a:pPr>
+            <a:r>
+              <a:rPr lang="en-US" b="1" dirty="0"/>
+              <a:t>Solution:</a:t>
+            </a:r>
+            <a:r>
+              <a:rPr lang="en-US" dirty="0"/>
+              <a:t> </a:t>
+            </a:r>
+            <a:br>
+              <a:rPr lang="en-US" dirty="0"/>
+            </a:br>
+            <a:r>
+              <a:rPr lang="en-US" dirty="0"/>
+              <a:t>Replicate the header as a "footer" at the end of the block.</a:t>
+            </a:r>
+            <a:br>
+              <a:rPr lang="en-US" dirty="0"/>
+            </a:br>
+            <a:r>
+              <a:rPr lang="en-US" dirty="0"/>
+              <a:t>Together, header and footer are "boundary tags," </a:t>
+            </a:r>
+            <a:br>
+              <a:rPr lang="en-US" dirty="0"/>
+            </a:br>
+            <a:r>
+              <a:rPr lang="en-US" dirty="0"/>
+              <a:t>allowing the allocator to traverse memory both forward and backward.</a:t>
             </a:r>
           </a:p>
           <a:p>
@@ -1559,7 +1700,7 @@
           <a:p>
             <a:fld id="{AFAF0173-F4FC-4AFC-92E6-E8B88A3FF416}" type="slidenum">
               <a:rPr lang="en-US" smtClean="0"/>
-              <a:t>20</a:t>
+              <a:t>19</a:t>
             </a:fld>
             <a:endParaRPr lang="en-US"/>
           </a:p>
@@ -1568,7 +1709,7 @@
     </p:spTree>
     <p:extLst>
       <p:ext uri="{BB962C8B-B14F-4D97-AF65-F5344CB8AC3E}">
-        <p14:creationId xmlns:p14="http://schemas.microsoft.com/office/powerpoint/2010/main" val="4160088963"/>
+        <p14:creationId xmlns:p14="http://schemas.microsoft.com/office/powerpoint/2010/main" val="3549130021"/>
       </p:ext>
     </p:extLst>
   </p:cSld>
@@ -1623,40 +1764,8 @@
           <a:lstStyle/>
           <a:p>
             <a:r>
-              <a:rPr lang="en-US" b="1" dirty="0"/>
-              <a:t>Footer Optimization</a:t>
-            </a:r>
-            <a:endParaRPr lang="en-US" dirty="0"/>
-          </a:p>
-          <a:p>
-            <a:r>
               <a:rPr lang="en-US" dirty="0"/>
-              <a:t>Always using footers is wasteful for small or allocated blocks.</a:t>
-            </a:r>
-          </a:p>
-          <a:p>
-            <a:endParaRPr lang="en-US" dirty="0"/>
-          </a:p>
-          <a:p>
-            <a:r>
-              <a:rPr lang="en-US" b="1" dirty="0"/>
-              <a:t>Optimization:</a:t>
-            </a:r>
-            <a:r>
-              <a:rPr lang="en-US" dirty="0"/>
-              <a:t> </a:t>
-            </a:r>
-          </a:p>
-          <a:p>
-            <a:r>
-              <a:rPr lang="en-US" dirty="0"/>
-              <a:t>Only free blocks require footers; </a:t>
-            </a:r>
-          </a:p>
-          <a:p>
-            <a:r>
-              <a:rPr lang="en-US" dirty="0"/>
-              <a:t>this is sufficient for a freed block to check its neighbors for merging.</a:t>
+              <a:t>Bidirectional coalescing using headers and footers.</a:t>
             </a:r>
           </a:p>
           <a:p>
@@ -1681,7 +1790,7 @@
           <a:p>
             <a:fld id="{AFAF0173-F4FC-4AFC-92E6-E8B88A3FF416}" type="slidenum">
               <a:rPr lang="en-US" smtClean="0"/>
-              <a:t>21</a:t>
+              <a:t>20</a:t>
             </a:fld>
             <a:endParaRPr lang="en-US"/>
           </a:p>
@@ -1690,7 +1799,7 @@
     </p:spTree>
     <p:extLst>
       <p:ext uri="{BB962C8B-B14F-4D97-AF65-F5344CB8AC3E}">
-        <p14:creationId xmlns:p14="http://schemas.microsoft.com/office/powerpoint/2010/main" val="3953777370"/>
+        <p14:creationId xmlns:p14="http://schemas.microsoft.com/office/powerpoint/2010/main" val="4160088963"/>
       </p:ext>
     </p:extLst>
   </p:cSld>
@@ -1746,36 +1855,39 @@
           <a:p>
             <a:r>
               <a:rPr lang="en-US" b="1" dirty="0"/>
-              <a:t>Explicit Free List Advantages</a:t>
+              <a:t>Footer Optimization</a:t>
             </a:r>
             <a:endParaRPr lang="en-US" dirty="0"/>
           </a:p>
           <a:p>
-            <a:pPr marL="171450" indent="-171450">
-              <a:buFont typeface="Arial" panose="020B0604020202020204" pitchFamily="34" charset="0"/>
-              <a:buChar char="•"/>
-            </a:pPr>
             <a:r>
               <a:rPr lang="en-US" dirty="0"/>
-              <a:t>Instead of scanning all blocks, the allocator only looks at free blocks.</a:t>
+              <a:t>Always using footers is wasteful for small or allocated blocks.</a:t>
             </a:r>
           </a:p>
           <a:p>
-            <a:pPr marL="171450" indent="-171450">
-              <a:buFont typeface="Arial" panose="020B0604020202020204" pitchFamily="34" charset="0"/>
-              <a:buChar char="•"/>
-            </a:pPr>
+            <a:endParaRPr lang="en-US" dirty="0"/>
+          </a:p>
+          <a:p>
+            <a:r>
+              <a:rPr lang="en-US" b="1" dirty="0"/>
+              <a:t>Optimization:</a:t>
+            </a:r>
             <a:r>
               <a:rPr lang="en-US" dirty="0"/>
-              <a:t>Search time becomes proportional to the number of </a:t>
-            </a:r>
-            <a:r>
-              <a:rPr lang="en-US" i="1" dirty="0"/>
-              <a:t>free</a:t>
-            </a:r>
+              <a:t> </a:t>
+            </a:r>
+          </a:p>
+          <a:p>
             <a:r>
               <a:rPr lang="en-US" dirty="0"/>
-              <a:t> blocks rather than total blocks.</a:t>
+              <a:t>Only free blocks require footers; </a:t>
+            </a:r>
+          </a:p>
+          <a:p>
+            <a:r>
+              <a:rPr lang="en-US" dirty="0"/>
+              <a:t>this is sufficient for a freed block to check its neighbors for merging.</a:t>
             </a:r>
           </a:p>
           <a:p>
@@ -1800,7 +1912,7 @@
           <a:p>
             <a:fld id="{AFAF0173-F4FC-4AFC-92E6-E8B88A3FF416}" type="slidenum">
               <a:rPr lang="en-US" smtClean="0"/>
-              <a:t>22</a:t>
+              <a:t>21</a:t>
             </a:fld>
             <a:endParaRPr lang="en-US"/>
           </a:p>
@@ -1809,7 +1921,7 @@
     </p:spTree>
     <p:extLst>
       <p:ext uri="{BB962C8B-B14F-4D97-AF65-F5344CB8AC3E}">
-        <p14:creationId xmlns:p14="http://schemas.microsoft.com/office/powerpoint/2010/main" val="705429008"/>
+        <p14:creationId xmlns:p14="http://schemas.microsoft.com/office/powerpoint/2010/main" val="3953777370"/>
       </p:ext>
     </p:extLst>
   </p:cSld>
@@ -1863,6 +1975,41 @@
           <a:bodyPr/>
           <a:lstStyle/>
           <a:p>
+            <a:r>
+              <a:rPr lang="en-US" b="1" dirty="0"/>
+              <a:t>Explicit Free List Advantages</a:t>
+            </a:r>
+            <a:endParaRPr lang="en-US" dirty="0"/>
+          </a:p>
+          <a:p>
+            <a:pPr marL="171450" indent="-171450">
+              <a:buFont typeface="Arial" panose="020B0604020202020204" pitchFamily="34" charset="0"/>
+              <a:buChar char="•"/>
+            </a:pPr>
+            <a:r>
+              <a:rPr lang="en-US" dirty="0"/>
+              <a:t>Instead of scanning all blocks, the allocator only looks at free blocks.</a:t>
+            </a:r>
+          </a:p>
+          <a:p>
+            <a:pPr marL="171450" indent="-171450">
+              <a:buFont typeface="Arial" panose="020B0604020202020204" pitchFamily="34" charset="0"/>
+              <a:buChar char="•"/>
+            </a:pPr>
+            <a:r>
+              <a:rPr lang="en-US" dirty="0"/>
+              <a:t>Search time becomes proportional to the number of </a:t>
+            </a:r>
+            <a:r>
+              <a:rPr lang="en-US" i="1" dirty="0"/>
+              <a:t>free</a:t>
+            </a:r>
+            <a:r>
+              <a:rPr lang="en-US" dirty="0"/>
+              <a:t> blocks rather than total blocks.</a:t>
+            </a:r>
+          </a:p>
+          <a:p>
             <a:endParaRPr lang="en-US" dirty="0"/>
           </a:p>
         </p:txBody>
@@ -1884,7 +2031,7 @@
           <a:p>
             <a:fld id="{AFAF0173-F4FC-4AFC-92E6-E8B88A3FF416}" type="slidenum">
               <a:rPr lang="en-US" smtClean="0"/>
-              <a:t>24</a:t>
+              <a:t>22</a:t>
             </a:fld>
             <a:endParaRPr lang="en-US"/>
           </a:p>
@@ -1893,7 +2040,7 @@
     </p:spTree>
     <p:extLst>
       <p:ext uri="{BB962C8B-B14F-4D97-AF65-F5344CB8AC3E}">
-        <p14:creationId xmlns:p14="http://schemas.microsoft.com/office/powerpoint/2010/main" val="2678860502"/>
+        <p14:creationId xmlns:p14="http://schemas.microsoft.com/office/powerpoint/2010/main" val="705429008"/>
       </p:ext>
     </p:extLst>
   </p:cSld>
@@ -2274,28 +2421,66 @@
           <a:p>
             <a:r>
               <a:rPr lang="en-US" b="1" dirty="0"/>
-              <a:t>Explicit Free List Structure</a:t>
-            </a:r>
+              <a:t>Figure 1:</a:t>
+            </a:r>
+          </a:p>
+          <a:p>
+            <a:r>
+              <a:rPr lang="en-US" dirty="0"/>
+              <a:t>A comparison of an allocated block versus a free block. </a:t>
+            </a:r>
+          </a:p>
+          <a:p>
+            <a:r>
+              <a:rPr lang="en-US" dirty="0"/>
+              <a:t>The free block diagram highlights the "old payload" area now housing explicit next and </a:t>
+            </a:r>
+            <a:r>
+              <a:rPr lang="en-US" dirty="0" err="1"/>
+              <a:t>prev</a:t>
+            </a:r>
+            <a:r>
+              <a:rPr lang="en-US" dirty="0"/>
+              <a:t> pointers, </a:t>
+            </a:r>
+          </a:p>
+          <a:p>
+            <a:r>
+              <a:rPr lang="en-US" dirty="0"/>
+              <a:t>used to navigate the free list without increasing memory overhead.</a:t>
+            </a:r>
+          </a:p>
+          <a:p>
             <a:endParaRPr lang="en-US" dirty="0"/>
           </a:p>
           <a:p>
-            <a:pPr marL="171450" indent="-171450">
-              <a:buFont typeface="Arial" panose="020B0604020202020204" pitchFamily="34" charset="0"/>
-              <a:buChar char="•"/>
-            </a:pPr>
-            <a:r>
-              <a:rPr lang="en-US" dirty="0"/>
-              <a:t>Logically a doubly linked list, but physically blocks may be scattered across memory.</a:t>
+            <a:r>
+              <a:rPr lang="en-US" b="1" dirty="0"/>
+              <a:t>Figure 2:</a:t>
             </a:r>
           </a:p>
           <a:p>
-            <a:pPr marL="171450" indent="-171450">
-              <a:buFont typeface="Arial" panose="020B0604020202020204" pitchFamily="34" charset="0"/>
-              <a:buChar char="•"/>
-            </a:pPr>
             <a:r>
               <a:rPr lang="en-US" dirty="0"/>
-              <a:t>Connection order is "jumbled" because memory is freed in random order.</a:t>
+              <a:t>"List Order ≠ Memory Order" </a:t>
+            </a:r>
+          </a:p>
+          <a:p>
+            <a:r>
+              <a:rPr lang="en-US" dirty="0"/>
+              <a:t>It shows an abstract doubly-linked list (A-B-C) </a:t>
+            </a:r>
+          </a:p>
+          <a:p>
+            <a:r>
+              <a:rPr lang="en-US" dirty="0"/>
+              <a:t>and its concrete implementation where pointers jump between non-contiguous memory addresses, </a:t>
+            </a:r>
+          </a:p>
+          <a:p>
+            <a:r>
+              <a:rPr lang="en-US" dirty="0"/>
+              <a:t>illustrating that free list logical order is independent of physical placement.</a:t>
             </a:r>
           </a:p>
           <a:p>
@@ -2320,7 +2505,7 @@
           <a:p>
             <a:fld id="{AFAF0173-F4FC-4AFC-92E6-E8B88A3FF416}" type="slidenum">
               <a:rPr lang="en-US" smtClean="0"/>
-              <a:t>25</a:t>
+              <a:t>24</a:t>
             </a:fld>
             <a:endParaRPr lang="en-US"/>
           </a:p>
@@ -2329,7 +2514,7 @@
     </p:spTree>
     <p:extLst>
       <p:ext uri="{BB962C8B-B14F-4D97-AF65-F5344CB8AC3E}">
-        <p14:creationId xmlns:p14="http://schemas.microsoft.com/office/powerpoint/2010/main" val="3085721777"/>
+        <p14:creationId xmlns:p14="http://schemas.microsoft.com/office/powerpoint/2010/main" val="2678860502"/>
       </p:ext>
     </p:extLst>
   </p:cSld>
@@ -2385,13 +2570,9 @@
           <a:p>
             <a:r>
               <a:rPr lang="en-US" b="1" dirty="0"/>
-              <a:t>Case 1 (No Coalescing):</a:t>
-            </a:r>
-            <a:r>
-              <a:rPr lang="en-US" dirty="0"/>
-              <a:t> </a:t>
-            </a:r>
-            <a:endParaRPr lang="en-US" b="1" dirty="0"/>
+              <a:t>Explicit Free List Structure</a:t>
+            </a:r>
+            <a:endParaRPr lang="en-US" dirty="0"/>
           </a:p>
           <a:p>
             <a:pPr marL="171450" indent="-171450">
@@ -2400,7 +2581,7 @@
             </a:pPr>
             <a:r>
               <a:rPr lang="en-US" dirty="0"/>
-              <a:t>Newly freed block is inserted at the root of the list, </a:t>
+              <a:t>Logically a doubly linked list, but physically blocks may be scattered across memory.</a:t>
             </a:r>
           </a:p>
           <a:p>
@@ -2410,7 +2591,7 @@
             </a:pPr>
             <a:r>
               <a:rPr lang="en-US" dirty="0"/>
-              <a:t>with pointers updated to make it the first element in the sequence.</a:t>
+              <a:t>Connection order is "jumbled" because memory is freed in random order.</a:t>
             </a:r>
           </a:p>
           <a:p>
@@ -2435,7 +2616,7 @@
           <a:p>
             <a:fld id="{AFAF0173-F4FC-4AFC-92E6-E8B88A3FF416}" type="slidenum">
               <a:rPr lang="en-US" smtClean="0"/>
-              <a:t>26</a:t>
+              <a:t>25</a:t>
             </a:fld>
             <a:endParaRPr lang="en-US"/>
           </a:p>
@@ -2444,7 +2625,7 @@
     </p:spTree>
     <p:extLst>
       <p:ext uri="{BB962C8B-B14F-4D97-AF65-F5344CB8AC3E}">
-        <p14:creationId xmlns:p14="http://schemas.microsoft.com/office/powerpoint/2010/main" val="1445218937"/>
+        <p14:creationId xmlns:p14="http://schemas.microsoft.com/office/powerpoint/2010/main" val="3085721777"/>
       </p:ext>
     </p:extLst>
   </p:cSld>
@@ -2498,6 +2679,37 @@
           <a:bodyPr/>
           <a:lstStyle/>
           <a:p>
+            <a:r>
+              <a:rPr lang="en-US" b="1" dirty="0"/>
+              <a:t>Case 1 (No Coalescing):</a:t>
+            </a:r>
+            <a:r>
+              <a:rPr lang="en-US" dirty="0"/>
+              <a:t> </a:t>
+            </a:r>
+            <a:endParaRPr lang="en-US" b="1" dirty="0"/>
+          </a:p>
+          <a:p>
+            <a:pPr marL="171450" indent="-171450">
+              <a:buFont typeface="Arial" panose="020B0604020202020204" pitchFamily="34" charset="0"/>
+              <a:buChar char="•"/>
+            </a:pPr>
+            <a:r>
+              <a:rPr lang="en-US" dirty="0"/>
+              <a:t>Newly freed block is inserted at the root of the list, </a:t>
+            </a:r>
+          </a:p>
+          <a:p>
+            <a:pPr marL="171450" indent="-171450">
+              <a:buFont typeface="Arial" panose="020B0604020202020204" pitchFamily="34" charset="0"/>
+              <a:buChar char="•"/>
+            </a:pPr>
+            <a:r>
+              <a:rPr lang="en-US" dirty="0"/>
+              <a:t>with pointers updated to make it the first element in the sequence.</a:t>
+            </a:r>
+          </a:p>
+          <a:p>
             <a:endParaRPr lang="en-US" dirty="0"/>
           </a:p>
         </p:txBody>
@@ -2519,7 +2731,7 @@
           <a:p>
             <a:fld id="{AFAF0173-F4FC-4AFC-92E6-E8B88A3FF416}" type="slidenum">
               <a:rPr lang="en-US" smtClean="0"/>
-              <a:t>27</a:t>
+              <a:t>26</a:t>
             </a:fld>
             <a:endParaRPr lang="en-US"/>
           </a:p>
@@ -2528,7 +2740,7 @@
     </p:spTree>
     <p:extLst>
       <p:ext uri="{BB962C8B-B14F-4D97-AF65-F5344CB8AC3E}">
-        <p14:creationId xmlns:p14="http://schemas.microsoft.com/office/powerpoint/2010/main" val="32269324"/>
+        <p14:creationId xmlns:p14="http://schemas.microsoft.com/office/powerpoint/2010/main" val="1445218937"/>
       </p:ext>
     </p:extLst>
   </p:cSld>
@@ -2584,7 +2796,47 @@
           <a:p>
             <a:r>
               <a:rPr lang="en-US" b="1" dirty="0"/>
-              <a:t>Case 2 (Previous Block Free):</a:t>
+              <a:t>Case 1: No Coalescing Needed</a:t>
+            </a:r>
+          </a:p>
+          <a:p>
+            <a:endParaRPr lang="en-US" b="1" dirty="0"/>
+          </a:p>
+          <a:p>
+            <a:r>
+              <a:rPr lang="en-US" b="1" dirty="0"/>
+              <a:t>Condition:</a:t>
+            </a:r>
+            <a:r>
+              <a:rPr lang="en-US" dirty="0"/>
+              <a:t> </a:t>
+            </a:r>
+          </a:p>
+          <a:p>
+            <a:r>
+              <a:rPr lang="en-US" dirty="0"/>
+              <a:t>An allocated block is being freed, but both its immediate physical neighbors (Previous &amp; Next) are currently </a:t>
+            </a:r>
+            <a:r>
+              <a:rPr lang="en-US" b="1" dirty="0"/>
+              <a:t>allocated</a:t>
+            </a:r>
+            <a:r>
+              <a:rPr lang="en-US" dirty="0"/>
+              <a:t>.</a:t>
+            </a:r>
+          </a:p>
+          <a:p>
+            <a:endParaRPr lang="en-US" dirty="0"/>
+          </a:p>
+          <a:p>
+            <a:r>
+              <a:rPr lang="en-US" b="1" dirty="0"/>
+              <a:t>Action:</a:t>
+            </a:r>
+            <a:r>
+              <a:rPr lang="en-US" dirty="0"/>
+              <a:t> </a:t>
             </a:r>
           </a:p>
           <a:p>
@@ -2594,7 +2846,7 @@
             </a:pPr>
             <a:r>
               <a:rPr lang="en-US" dirty="0"/>
-              <a:t>A block is freed adjacent to a predecessor free block.</a:t>
+              <a:t>No merging occurs because there are no adjacent free blocks.</a:t>
             </a:r>
           </a:p>
           <a:p>
@@ -2604,14 +2856,52 @@
             </a:pPr>
             <a:r>
               <a:rPr lang="en-US" dirty="0"/>
-              <a:t>The two are coalesced into a single larger block </a:t>
-            </a:r>
-            <a:br>
+              <a:t>The newly freed block is simply added to the front of the </a:t>
+            </a:r>
+            <a:r>
+              <a:rPr lang="en-US" b="1" dirty="0"/>
+              <a:t>Free List</a:t>
+            </a:r>
+            <a:r>
               <a:rPr lang="en-US" dirty="0"/>
-            </a:br>
+              <a:t>.</a:t>
+            </a:r>
+          </a:p>
+          <a:p>
+            <a:pPr marL="0" indent="0">
+              <a:buFont typeface="Arial" panose="020B0604020202020204" pitchFamily="34" charset="0"/>
+              <a:buNone/>
+            </a:pPr>
+            <a:endParaRPr lang="en-US" dirty="0"/>
+          </a:p>
+          <a:p>
+            <a:r>
+              <a:rPr lang="en-US" b="1" dirty="0"/>
+              <a:t>Linking:</a:t>
+            </a:r>
             <a:r>
               <a:rPr lang="en-US" dirty="0"/>
-              <a:t>and then moved to the root of the list.</a:t>
+              <a:t> </a:t>
+            </a:r>
+          </a:p>
+          <a:p>
+            <a:r>
+              <a:rPr lang="en-US" dirty="0"/>
+              <a:t>Create a double link between the </a:t>
+            </a:r>
+            <a:r>
+              <a:rPr lang="en-US" b="1" dirty="0"/>
+              <a:t>Root (Head)</a:t>
+            </a:r>
+            <a:r>
+              <a:rPr lang="en-US" dirty="0"/>
+              <a:t> and the newly freed block, </a:t>
+            </a:r>
+          </a:p>
+          <a:p>
+            <a:r>
+              <a:rPr lang="en-US" dirty="0"/>
+              <a:t>and between the newly freed block and the old "First Free Block."</a:t>
             </a:r>
           </a:p>
           <a:p>
@@ -2636,7 +2926,7 @@
           <a:p>
             <a:fld id="{AFAF0173-F4FC-4AFC-92E6-E8B88A3FF416}" type="slidenum">
               <a:rPr lang="en-US" smtClean="0"/>
-              <a:t>28</a:t>
+              <a:t>27</a:t>
             </a:fld>
             <a:endParaRPr lang="en-US"/>
           </a:p>
@@ -2645,7 +2935,7 @@
     </p:spTree>
     <p:extLst>
       <p:ext uri="{BB962C8B-B14F-4D97-AF65-F5344CB8AC3E}">
-        <p14:creationId xmlns:p14="http://schemas.microsoft.com/office/powerpoint/2010/main" val="2405122921"/>
+        <p14:creationId xmlns:p14="http://schemas.microsoft.com/office/powerpoint/2010/main" val="32269324"/>
       </p:ext>
     </p:extLst>
   </p:cSld>
@@ -2699,6 +2989,39 @@
           <a:bodyPr/>
           <a:lstStyle/>
           <a:p>
+            <a:r>
+              <a:rPr lang="en-US" b="1" dirty="0"/>
+              <a:t>Case 2 (Previous Block Free):</a:t>
+            </a:r>
+          </a:p>
+          <a:p>
+            <a:pPr marL="171450" indent="-171450">
+              <a:buFont typeface="Arial" panose="020B0604020202020204" pitchFamily="34" charset="0"/>
+              <a:buChar char="•"/>
+            </a:pPr>
+            <a:r>
+              <a:rPr lang="en-US" dirty="0"/>
+              <a:t>A block is freed adjacent to a predecessor free block.</a:t>
+            </a:r>
+          </a:p>
+          <a:p>
+            <a:pPr marL="171450" indent="-171450">
+              <a:buFont typeface="Arial" panose="020B0604020202020204" pitchFamily="34" charset="0"/>
+              <a:buChar char="•"/>
+            </a:pPr>
+            <a:r>
+              <a:rPr lang="en-US" dirty="0"/>
+              <a:t>The two are coalesced into a single larger block </a:t>
+            </a:r>
+            <a:br>
+              <a:rPr lang="en-US" dirty="0"/>
+            </a:br>
+            <a:r>
+              <a:rPr lang="en-US" dirty="0"/>
+              <a:t>and then moved to the root of the list.</a:t>
+            </a:r>
+          </a:p>
+          <a:p>
             <a:endParaRPr lang="en-US" dirty="0"/>
           </a:p>
         </p:txBody>
@@ -2720,7 +3043,7 @@
           <a:p>
             <a:fld id="{AFAF0173-F4FC-4AFC-92E6-E8B88A3FF416}" type="slidenum">
               <a:rPr lang="en-US" smtClean="0"/>
-              <a:t>29</a:t>
+              <a:t>28</a:t>
             </a:fld>
             <a:endParaRPr lang="en-US"/>
           </a:p>
@@ -2729,7 +3052,7 @@
     </p:spTree>
     <p:extLst>
       <p:ext uri="{BB962C8B-B14F-4D97-AF65-F5344CB8AC3E}">
-        <p14:creationId xmlns:p14="http://schemas.microsoft.com/office/powerpoint/2010/main" val="3301060341"/>
+        <p14:creationId xmlns:p14="http://schemas.microsoft.com/office/powerpoint/2010/main" val="2405122921"/>
       </p:ext>
     </p:extLst>
   </p:cSld>
@@ -2785,8 +3108,45 @@
           <a:p>
             <a:r>
               <a:rPr lang="en-US" b="1" dirty="0"/>
-              <a:t>Case 3 (Next Block Free):</a:t>
-            </a:r>
+              <a:t>Coalescing With The Next Block</a:t>
+            </a:r>
+          </a:p>
+          <a:p>
+            <a:endParaRPr lang="en-US" b="1" dirty="0"/>
+          </a:p>
+          <a:p>
+            <a:r>
+              <a:rPr lang="en-US" b="1" dirty="0"/>
+              <a:t>Condition:</a:t>
+            </a:r>
+            <a:r>
+              <a:rPr lang="en-US" dirty="0"/>
+              <a:t> </a:t>
+            </a:r>
+          </a:p>
+          <a:p>
+            <a:r>
+              <a:rPr lang="en-US" dirty="0"/>
+              <a:t>An allocated block is being freed, and its physically </a:t>
+            </a:r>
+            <a:r>
+              <a:rPr lang="en-US" b="1" dirty="0"/>
+              <a:t>subsequent (Next)</a:t>
+            </a:r>
+            <a:r>
+              <a:rPr lang="en-US" dirty="0"/>
+              <a:t> block is already free.</a:t>
+            </a:r>
+          </a:p>
+          <a:p>
+            <a:endParaRPr lang="en-US" dirty="0"/>
+          </a:p>
+          <a:p>
+            <a:r>
+              <a:rPr lang="en-US" b="1" dirty="0"/>
+              <a:t>Action:</a:t>
+            </a:r>
+            <a:endParaRPr lang="en-US" b="0" dirty="0"/>
           </a:p>
           <a:p>
             <a:pPr marL="171450" indent="-171450">
@@ -2794,8 +3154,12 @@
               <a:buChar char="•"/>
             </a:pPr>
             <a:r>
+              <a:rPr lang="en-US" b="1" dirty="0"/>
+              <a:t>Splice Out:</a:t>
+            </a:r>
+            <a:r>
               <a:rPr lang="en-US" dirty="0"/>
-              <a:t>Splicing of a successor block and </a:t>
+              <a:t> The existing free block is removed (ejected) from the Free List first.</a:t>
             </a:r>
           </a:p>
           <a:p>
@@ -2804,9 +3168,73 @@
               <a:buChar char="•"/>
             </a:pPr>
             <a:r>
+              <a:rPr lang="en-US" b="1" dirty="0"/>
+              <a:t>Merge:</a:t>
+            </a:r>
+            <a:r>
               <a:rPr lang="en-US" dirty="0"/>
-              <a:t>the subsequent coalescence into a new free block positioned at the list root.</a:t>
-            </a:r>
+              <a:t> The newly freed block and the ejected block are joined into one larger block using </a:t>
+            </a:r>
+            <a:r>
+              <a:rPr lang="en-US" b="1" dirty="0"/>
+              <a:t>Boundary Tags</a:t>
+            </a:r>
+            <a:r>
+              <a:rPr lang="en-US" dirty="0"/>
+              <a:t>.</a:t>
+            </a:r>
+          </a:p>
+          <a:p>
+            <a:pPr marL="171450" indent="-171450">
+              <a:buFont typeface="Arial" panose="020B0604020202020204" pitchFamily="34" charset="0"/>
+              <a:buChar char="•"/>
+            </a:pPr>
+            <a:r>
+              <a:rPr lang="en-US" b="1" dirty="0"/>
+              <a:t>Re-insert:</a:t>
+            </a:r>
+            <a:r>
+              <a:rPr lang="en-US" dirty="0"/>
+              <a:t> The new, larger coalesced block is inserted at the </a:t>
+            </a:r>
+            <a:r>
+              <a:rPr lang="en-US" b="1" dirty="0"/>
+              <a:t>very front</a:t>
+            </a:r>
+            <a:r>
+              <a:rPr lang="en-US" dirty="0"/>
+              <a:t> of the Free List.</a:t>
+            </a:r>
+          </a:p>
+          <a:p>
+            <a:pPr marL="0" indent="0">
+              <a:buFont typeface="Arial" panose="020B0604020202020204" pitchFamily="34" charset="0"/>
+              <a:buNone/>
+            </a:pPr>
+            <a:endParaRPr lang="en-US" dirty="0"/>
+          </a:p>
+          <a:p>
+            <a:r>
+              <a:rPr lang="en-US" i="1" dirty="0"/>
+              <a:t>(</a:t>
+            </a:r>
+            <a:r>
+              <a:rPr lang="en-US" b="1" i="1" dirty="0"/>
+              <a:t>Note: </a:t>
+            </a:r>
+            <a:r>
+              <a:rPr lang="en-US" i="1" dirty="0"/>
+              <a:t>The slide title mentions "Previous Block," but the diagram and text describe merging with the physically </a:t>
+            </a:r>
+            <a:r>
+              <a:rPr lang="en-US" b="1" i="1" dirty="0"/>
+              <a:t>Next</a:t>
+            </a:r>
+            <a:r>
+              <a:rPr lang="en-US" i="1" dirty="0"/>
+              <a:t> block).</a:t>
+            </a:r>
+            <a:endParaRPr lang="en-US" dirty="0"/>
           </a:p>
           <a:p>
             <a:endParaRPr lang="en-US" dirty="0"/>
@@ -2830,7 +3258,7 @@
           <a:p>
             <a:fld id="{AFAF0173-F4FC-4AFC-92E6-E8B88A3FF416}" type="slidenum">
               <a:rPr lang="en-US" smtClean="0"/>
-              <a:t>30</a:t>
+              <a:t>29</a:t>
             </a:fld>
             <a:endParaRPr lang="en-US"/>
           </a:p>
@@ -2839,7 +3267,7 @@
     </p:spTree>
     <p:extLst>
       <p:ext uri="{BB962C8B-B14F-4D97-AF65-F5344CB8AC3E}">
-        <p14:creationId xmlns:p14="http://schemas.microsoft.com/office/powerpoint/2010/main" val="2833291846"/>
+        <p14:creationId xmlns:p14="http://schemas.microsoft.com/office/powerpoint/2010/main" val="3301060341"/>
       </p:ext>
     </p:extLst>
   </p:cSld>
@@ -2895,7 +3323,7 @@
           <a:p>
             <a:r>
               <a:rPr lang="en-US" b="1" dirty="0"/>
-              <a:t>Case 4 (Both Adjacent Free):</a:t>
+              <a:t>Case 3 (Next Block Free):</a:t>
             </a:r>
           </a:p>
           <a:p>
@@ -2905,7 +3333,7 @@
             </a:pPr>
             <a:r>
               <a:rPr lang="en-US" dirty="0"/>
-              <a:t>A block is freed between two existing free blocks.</a:t>
+              <a:t>Splicing of a successor block and </a:t>
             </a:r>
           </a:p>
           <a:p>
@@ -2915,14 +3343,7 @@
             </a:pPr>
             <a:r>
               <a:rPr lang="en-US" dirty="0"/>
-              <a:t>All three are coalesced into one large block, </a:t>
-            </a:r>
-            <a:br>
-              <a:rPr lang="en-US" dirty="0"/>
-            </a:br>
-            <a:r>
-              <a:rPr lang="en-US" dirty="0"/>
-              <a:t>which is then linked at the root of the free list.</a:t>
+              <a:t>the subsequent coalescence into a new free block positioned at the list root.</a:t>
             </a:r>
           </a:p>
           <a:p>
@@ -2947,7 +3368,7 @@
           <a:p>
             <a:fld id="{AFAF0173-F4FC-4AFC-92E6-E8B88A3FF416}" type="slidenum">
               <a:rPr lang="en-US" smtClean="0"/>
-              <a:t>31</a:t>
+              <a:t>30</a:t>
             </a:fld>
             <a:endParaRPr lang="en-US"/>
           </a:p>
@@ -2956,7 +3377,7 @@
     </p:spTree>
     <p:extLst>
       <p:ext uri="{BB962C8B-B14F-4D97-AF65-F5344CB8AC3E}">
-        <p14:creationId xmlns:p14="http://schemas.microsoft.com/office/powerpoint/2010/main" val="3549601328"/>
+        <p14:creationId xmlns:p14="http://schemas.microsoft.com/office/powerpoint/2010/main" val="2833291846"/>
       </p:ext>
     </p:extLst>
   </p:cSld>
@@ -3009,6 +3430,220 @@
         <p:txBody>
           <a:bodyPr/>
           <a:lstStyle/>
+          <a:p>
+            <a:r>
+              <a:rPr lang="en-US" b="1" dirty="0"/>
+              <a:t>Case 4 (Both Adjacent Free):</a:t>
+            </a:r>
+          </a:p>
+          <a:p>
+            <a:pPr marL="171450" indent="-171450">
+              <a:buFont typeface="Arial" panose="020B0604020202020204" pitchFamily="34" charset="0"/>
+              <a:buChar char="•"/>
+            </a:pPr>
+            <a:r>
+              <a:rPr lang="en-US" dirty="0"/>
+              <a:t>A block is freed between two existing free blocks.</a:t>
+            </a:r>
+          </a:p>
+          <a:p>
+            <a:pPr marL="171450" indent="-171450">
+              <a:buFont typeface="Arial" panose="020B0604020202020204" pitchFamily="34" charset="0"/>
+              <a:buChar char="•"/>
+            </a:pPr>
+            <a:r>
+              <a:rPr lang="en-US" dirty="0"/>
+              <a:t>All three are coalesced into one large block, </a:t>
+            </a:r>
+            <a:br>
+              <a:rPr lang="en-US" dirty="0"/>
+            </a:br>
+            <a:r>
+              <a:rPr lang="en-US" dirty="0"/>
+              <a:t>which is then linked at the root of the free list.</a:t>
+            </a:r>
+          </a:p>
+          <a:p>
+            <a:endParaRPr lang="en-US" dirty="0"/>
+          </a:p>
+        </p:txBody>
+      </p:sp>
+      <p:sp>
+        <p:nvSpPr>
+          <p:cNvPr id="4" name="Slide Number Placeholder 3"/>
+          <p:cNvSpPr>
+            <a:spLocks noGrp="1"/>
+          </p:cNvSpPr>
+          <p:nvPr>
+            <p:ph type="sldNum" sz="quarter" idx="5"/>
+          </p:nvPr>
+        </p:nvSpPr>
+        <p:spPr/>
+        <p:txBody>
+          <a:bodyPr/>
+          <a:lstStyle/>
+          <a:p>
+            <a:fld id="{AFAF0173-F4FC-4AFC-92E6-E8B88A3FF416}" type="slidenum">
+              <a:rPr lang="en-US" smtClean="0"/>
+              <a:t>31</a:t>
+            </a:fld>
+            <a:endParaRPr lang="en-US"/>
+          </a:p>
+        </p:txBody>
+      </p:sp>
+    </p:spTree>
+    <p:extLst>
+      <p:ext uri="{BB962C8B-B14F-4D97-AF65-F5344CB8AC3E}">
+        <p14:creationId xmlns:p14="http://schemas.microsoft.com/office/powerpoint/2010/main" val="3549601328"/>
+      </p:ext>
+    </p:extLst>
+  </p:cSld>
+  <p:clrMapOvr>
+    <a:masterClrMapping/>
+  </p:clrMapOvr>
+</p:notes>
+</file>
+
+<file path=ppt/notesSlides/notesSlide28.xml><?xml version="1.0" encoding="utf-8"?>
+<p:notes xmlns:a="http://schemas.openxmlformats.org/drawingml/2006/main" xmlns:r="http://schemas.openxmlformats.org/officeDocument/2006/relationships" xmlns:p="http://schemas.openxmlformats.org/presentationml/2006/main">
+  <p:cSld>
+    <p:spTree>
+      <p:nvGrpSpPr>
+        <p:cNvPr id="1" name=""/>
+        <p:cNvGrpSpPr/>
+        <p:nvPr/>
+      </p:nvGrpSpPr>
+      <p:grpSpPr>
+        <a:xfrm>
+          <a:off x="0" y="0"/>
+          <a:ext cx="0" cy="0"/>
+          <a:chOff x="0" y="0"/>
+          <a:chExt cx="0" cy="0"/>
+        </a:xfrm>
+      </p:grpSpPr>
+      <p:sp>
+        <p:nvSpPr>
+          <p:cNvPr id="2" name="Slide Image Placeholder 1"/>
+          <p:cNvSpPr>
+            <a:spLocks noGrp="1" noRot="1" noChangeAspect="1"/>
+          </p:cNvSpPr>
+          <p:nvPr>
+            <p:ph type="sldImg"/>
+          </p:nvPr>
+        </p:nvSpPr>
+        <p:spPr/>
+      </p:sp>
+      <p:sp>
+        <p:nvSpPr>
+          <p:cNvPr id="3" name="Notes Placeholder 2"/>
+          <p:cNvSpPr>
+            <a:spLocks noGrp="1"/>
+          </p:cNvSpPr>
+          <p:nvPr>
+            <p:ph type="body" idx="1"/>
+          </p:nvPr>
+        </p:nvSpPr>
+        <p:spPr/>
+        <p:txBody>
+          <a:bodyPr/>
+          <a:lstStyle/>
+          <a:p>
+            <a:r>
+              <a:rPr lang="en-US" b="1" dirty="0"/>
+              <a:t>Case 4: Coalescing With Both Adjacent Blocks</a:t>
+            </a:r>
+          </a:p>
+          <a:p>
+            <a:endParaRPr lang="en-US" b="1" dirty="0"/>
+          </a:p>
+          <a:p>
+            <a:r>
+              <a:rPr lang="en-US" b="1" dirty="0"/>
+              <a:t>Condition:</a:t>
+            </a:r>
+            <a:r>
+              <a:rPr lang="en-US" dirty="0"/>
+              <a:t> </a:t>
+            </a:r>
+          </a:p>
+          <a:p>
+            <a:r>
+              <a:rPr lang="en-US" dirty="0"/>
+              <a:t>An allocated block is being freed, and </a:t>
+            </a:r>
+            <a:r>
+              <a:rPr lang="en-US" b="1" dirty="0"/>
+              <a:t>both</a:t>
+            </a:r>
+            <a:r>
+              <a:rPr lang="en-US" dirty="0"/>
+              <a:t> its physical neighbors (Previous &amp; Next) are already free.</a:t>
+            </a:r>
+          </a:p>
+          <a:p>
+            <a:endParaRPr lang="en-US" dirty="0"/>
+          </a:p>
+          <a:p>
+            <a:r>
+              <a:rPr lang="en-US" b="1" dirty="0"/>
+              <a:t>Action:</a:t>
+            </a:r>
+            <a:endParaRPr lang="en-US" b="0" dirty="0"/>
+          </a:p>
+          <a:p>
+            <a:pPr marL="171450" indent="-171450">
+              <a:buFont typeface="Arial" panose="020B0604020202020204" pitchFamily="34" charset="0"/>
+              <a:buChar char="•"/>
+            </a:pPr>
+            <a:r>
+              <a:rPr lang="en-US" b="1" dirty="0"/>
+              <a:t>Extraction:</a:t>
+            </a:r>
+            <a:r>
+              <a:rPr lang="en-US" dirty="0"/>
+              <a:t> Both the Previous and Next free blocks are "spliced out" from the Free List.</a:t>
+            </a:r>
+          </a:p>
+          <a:p>
+            <a:pPr marL="171450" indent="-171450">
+              <a:buFont typeface="Arial" panose="020B0604020202020204" pitchFamily="34" charset="0"/>
+              <a:buChar char="•"/>
+            </a:pPr>
+            <a:r>
+              <a:rPr lang="en-US" b="1" dirty="0"/>
+              <a:t>Triple Merge:</a:t>
+            </a:r>
+            <a:r>
+              <a:rPr lang="en-US" dirty="0"/>
+              <a:t> All three blocks (Previous + Newly Freed + Next) are combined into a single, large continuous free block.</a:t>
+            </a:r>
+          </a:p>
+          <a:p>
+            <a:pPr marL="171450" indent="-171450">
+              <a:buFont typeface="Arial" panose="020B0604020202020204" pitchFamily="34" charset="0"/>
+              <a:buChar char="•"/>
+            </a:pPr>
+            <a:r>
+              <a:rPr lang="en-US" b="1"/>
+              <a:t>Re-insert</a:t>
+            </a:r>
+            <a:r>
+              <a:rPr lang="en-US" b="1" dirty="0"/>
+              <a:t>:</a:t>
+            </a:r>
+            <a:r>
+              <a:rPr lang="en-US" dirty="0"/>
+              <a:t> This single large block is then placed at the </a:t>
+            </a:r>
+            <a:r>
+              <a:rPr lang="en-US" b="1" dirty="0"/>
+              <a:t>front</a:t>
+            </a:r>
+            <a:r>
+              <a:rPr lang="en-US" dirty="0"/>
+              <a:t> of the Free List.</a:t>
+            </a:r>
+          </a:p>
           <a:p>
             <a:endParaRPr lang="en-US" dirty="0"/>
           </a:p>
@@ -22162,7 +22797,7 @@
               </a:rPr>
               <a:t>until:</a:t>
             </a:r>
-            <a:endParaRPr sz="1500">
+            <a:endParaRPr sz="1500" dirty="0">
               <a:latin typeface="Arial MT"/>
               <a:cs typeface="Arial MT"/>
             </a:endParaRPr>
@@ -22243,7 +22878,7 @@
               </a:rPr>
               <a:t>fails.</a:t>
             </a:r>
-            <a:endParaRPr sz="1500">
+            <a:endParaRPr sz="1500" dirty="0">
               <a:latin typeface="Arial MT"/>
               <a:cs typeface="Arial MT"/>
             </a:endParaRPr>
@@ -22359,7 +22994,7 @@
               </a:rPr>
               <a:t>triggered.</a:t>
             </a:r>
-            <a:endParaRPr sz="1500">
+            <a:endParaRPr sz="1500" dirty="0">
               <a:latin typeface="Arial MT"/>
               <a:cs typeface="Arial MT"/>
             </a:endParaRPr>
@@ -22380,7 +23015,7 @@
               </a:rPr>
               <a:t>Pros:</a:t>
             </a:r>
-            <a:endParaRPr sz="1500">
+            <a:endParaRPr sz="1500" dirty="0">
               <a:latin typeface="Arial"/>
               <a:cs typeface="Arial"/>
             </a:endParaRPr>
@@ -22433,7 +23068,7 @@
               </a:rPr>
               <a:t>merges.</a:t>
             </a:r>
-            <a:endParaRPr sz="1500">
+            <a:endParaRPr sz="1500" dirty="0">
               <a:latin typeface="Arial MT"/>
               <a:cs typeface="Arial MT"/>
             </a:endParaRPr>
@@ -22616,7 +23251,7 @@
               </a:rPr>
               <a:t>work).</a:t>
             </a:r>
-            <a:endParaRPr sz="1500">
+            <a:endParaRPr sz="1500" dirty="0">
               <a:latin typeface="Arial MT"/>
               <a:cs typeface="Arial MT"/>
             </a:endParaRPr>
@@ -22711,7 +23346,7 @@
               </a:rPr>
               <a:t>cycles.</a:t>
             </a:r>
-            <a:endParaRPr sz="1500">
+            <a:endParaRPr sz="1500" dirty="0">
               <a:latin typeface="Arial MT"/>
               <a:cs typeface="Arial MT"/>
             </a:endParaRPr>
@@ -22732,7 +23367,7 @@
               </a:rPr>
               <a:t>Cons:</a:t>
             </a:r>
-            <a:endParaRPr sz="1500">
+            <a:endParaRPr sz="1500" dirty="0">
               <a:latin typeface="Arial"/>
               <a:cs typeface="Arial"/>
             </a:endParaRPr>
@@ -22869,7 +23504,7 @@
               </a:rPr>
               <a:t>time.</a:t>
             </a:r>
-            <a:endParaRPr sz="1500">
+            <a:endParaRPr sz="1500" dirty="0">
               <a:latin typeface="Arial MT"/>
               <a:cs typeface="Arial MT"/>
             </a:endParaRPr>
@@ -23024,7 +23659,7 @@
               </a:rPr>
               <a:t>time).</a:t>
             </a:r>
-            <a:endParaRPr sz="1500">
+            <a:endParaRPr sz="1500" dirty="0">
               <a:latin typeface="Arial MT"/>
               <a:cs typeface="Arial MT"/>
             </a:endParaRPr>
@@ -23077,7 +23712,7 @@
               </a:rPr>
               <a:t>performance.</a:t>
             </a:r>
-            <a:endParaRPr sz="1500">
+            <a:endParaRPr sz="1500" dirty="0">
               <a:latin typeface="Arial MT"/>
               <a:cs typeface="Arial MT"/>
             </a:endParaRPr>
@@ -24382,7 +25017,7 @@
                 <p:nvPr/>
               </p:nvPicPr>
               <p:blipFill>
-                <a:blip r:embed="rId2"/>
+                <a:blip r:embed="rId3"/>
                 <a:stretch>
                   <a:fillRect/>
                 </a:stretch>
@@ -24886,7 +25521,7 @@
               <p:nvPr/>
             </p:nvPicPr>
             <p:blipFill>
-              <a:blip r:embed="rId3"/>
+              <a:blip r:embed="rId4"/>
               <a:stretch>
                 <a:fillRect/>
               </a:stretch>
@@ -24916,7 +25551,7 @@
               <p:nvPr/>
             </p:nvPicPr>
             <p:blipFill>
-              <a:blip r:embed="rId4"/>
+              <a:blip r:embed="rId5"/>
               <a:stretch>
                 <a:fillRect/>
               </a:stretch>
@@ -24959,7 +25594,7 @@
               <p:nvPr/>
             </p:nvPicPr>
             <p:blipFill>
-              <a:blip r:embed="rId5" cstate="print"/>
+              <a:blip r:embed="rId6" cstate="print"/>
               <a:stretch>
                 <a:fillRect/>
               </a:stretch>
